--- a/SIH_Presentation.pptx
+++ b/SIH_Presentation.pptx
@@ -261,7 +261,7 @@
             <a:fld id="{C4D5ADD5-2BBC-4A94-8F86-D9013941F742}" type="datetimeFigureOut">
               <a:rPr lang="en-US"/>
               <a:pPr/>
-              <a:t>9/11/2026</a:t>
+              <a:t>9/12/2026</a:t>
             </a:fld>
             <a:endParaRPr lang="en-US"/>
           </a:p>
@@ -1534,7 +1534,7 @@
           <a:p>
             <a:fld id="{E60792E3-D524-454C-8AFD-A91972900BCB}" type="datetime1">
               <a:rPr lang="en-US" smtClean="0"/>
-              <a:t>9/11/2026</a:t>
+              <a:t>9/12/2026</a:t>
             </a:fld>
             <a:endParaRPr lang="en-US"/>
           </a:p>
@@ -1716,7 +1716,7 @@
           <a:p>
             <a:fld id="{053C3A68-6922-42D3-8905-ECC2D82A3469}" type="datetime1">
               <a:rPr lang="en-US" smtClean="0"/>
-              <a:t>9/11/2026</a:t>
+              <a:t>9/12/2026</a:t>
             </a:fld>
             <a:endParaRPr lang="en-US"/>
           </a:p>
@@ -1908,7 +1908,7 @@
           <a:p>
             <a:fld id="{CB69E9F4-7604-4950-A8B2-8ACDEDB1506E}" type="datetime1">
               <a:rPr lang="en-US" smtClean="0"/>
-              <a:t>9/11/2026</a:t>
+              <a:t>9/12/2026</a:t>
             </a:fld>
             <a:endParaRPr lang="en-US"/>
           </a:p>
@@ -2090,7 +2090,7 @@
           <a:p>
             <a:fld id="{708B7524-32A2-4C20-A58C-BC3BAA1042FC}" type="datetime1">
               <a:rPr lang="en-US" smtClean="0"/>
-              <a:t>9/11/2026</a:t>
+              <a:t>9/12/2026</a:t>
             </a:fld>
             <a:endParaRPr lang="en-US"/>
           </a:p>
@@ -2349,7 +2349,7 @@
           <a:p>
             <a:fld id="{1E994447-D6B2-43BB-A877-57F1A267B999}" type="datetime1">
               <a:rPr lang="en-US" smtClean="0"/>
-              <a:t>9/11/2026</a:t>
+              <a:t>9/12/2026</a:t>
             </a:fld>
             <a:endParaRPr lang="en-US"/>
           </a:p>
@@ -2648,7 +2648,7 @@
           <a:p>
             <a:fld id="{68920E16-BD35-483C-AA6B-346FC7E46DEA}" type="datetime1">
               <a:rPr lang="en-US" smtClean="0"/>
-              <a:t>9/11/2026</a:t>
+              <a:t>9/12/2026</a:t>
             </a:fld>
             <a:endParaRPr lang="en-US"/>
           </a:p>
@@ -3081,7 +3081,7 @@
           <a:p>
             <a:fld id="{2FEAC6F8-5103-4FC0-A69E-5C6AE6469DA8}" type="datetime1">
               <a:rPr lang="en-US" smtClean="0"/>
-              <a:t>9/11/2026</a:t>
+              <a:t>9/12/2026</a:t>
             </a:fld>
             <a:endParaRPr lang="en-US"/>
           </a:p>
@@ -3212,7 +3212,7 @@
           <a:p>
             <a:fld id="{C60C6921-0627-4C8F-83D5-0CF936D2FFDD}" type="datetime1">
               <a:rPr lang="en-US" smtClean="0"/>
-              <a:t>9/11/2026</a:t>
+              <a:t>9/12/2026</a:t>
             </a:fld>
             <a:endParaRPr lang="en-US"/>
           </a:p>
@@ -3321,7 +3321,7 @@
           <a:p>
             <a:fld id="{2FF08AD7-8103-40F8-983C-E2BA6BB9CBE0}" type="datetime1">
               <a:rPr lang="en-US" smtClean="0"/>
-              <a:t>9/11/2026</a:t>
+              <a:t>9/12/2026</a:t>
             </a:fld>
             <a:endParaRPr lang="en-US"/>
           </a:p>
@@ -3610,7 +3610,7 @@
           <a:p>
             <a:fld id="{DF8C06B4-9380-4A4D-AF49-A3596E17DAF5}" type="datetime1">
               <a:rPr lang="en-US" smtClean="0"/>
-              <a:t>9/11/2026</a:t>
+              <a:t>9/12/2026</a:t>
             </a:fld>
             <a:endParaRPr lang="en-US"/>
           </a:p>
@@ -3879,7 +3879,7 @@
           <a:p>
             <a:fld id="{EF7FDEF1-C582-4E22-9E77-D68326471F28}" type="datetime1">
               <a:rPr lang="en-US" smtClean="0"/>
-              <a:t>9/11/2026</a:t>
+              <a:t>9/12/2026</a:t>
             </a:fld>
             <a:endParaRPr lang="en-US"/>
           </a:p>
@@ -4122,7 +4122,7 @@
           <a:p>
             <a:fld id="{780A9602-A9A9-453F-AEF1-37B5837E02CD}" type="datetime1">
               <a:rPr lang="en-US" smtClean="0"/>
-              <a:t>9/11/2026</a:t>
+              <a:t>9/12/2026</a:t>
             </a:fld>
             <a:endParaRPr lang="en-US"/>
           </a:p>
@@ -5625,19 +5625,7 @@
               <a:rPr sz="2000" b="0" dirty="0">
                 <a:latin typeface="Arial"/>
               </a:rPr>
-              <a:t>AI-Driven and Harmonization of Material Codes </a:t>
-            </a:r>
-            <a:r>
-              <a:rPr lang="en-IN" sz="2000" dirty="0">
-                <a:latin typeface="Arial"/>
-              </a:rPr>
-              <a:t>Standardization</a:t>
-            </a:r>
-            <a:r>
-              <a:rPr sz="2000" b="0" dirty="0">
-                <a:latin typeface="Arial"/>
-              </a:rPr>
-              <a:t>Across CPSEs (</a:t>
+              <a:t>AI-Driven Standardization and Harmonization of Material Codes Across CPSEs (</a:t>
             </a:r>
             <a:r>
               <a:rPr sz="2000" b="0" dirty="0" err="1">
@@ -5719,13 +5707,7 @@
               <a:rPr sz="2000" b="1" dirty="0">
                 <a:latin typeface="Arial"/>
               </a:rPr>
-              <a:t>Team Name </a:t>
-            </a:r>
-            <a:r>
-              <a:rPr lang="en-US" sz="2000" b="1" dirty="0">
-                <a:latin typeface="Arial"/>
-              </a:rPr>
-              <a:t>: </a:t>
+              <a:t>Team Name: </a:t>
             </a:r>
             <a:r>
               <a:rPr sz="2000" b="0" dirty="0" err="1">
@@ -6044,7 +6026,7 @@
         <p:spPr>
           <a:xfrm>
             <a:off x="404640" y="1439199"/>
-            <a:ext cx="3632219" cy="4389120"/>
+            <a:ext cx="3632219" cy="3123932"/>
           </a:xfrm>
           <a:prstGeom prst="rect">
             <a:avLst/>
@@ -6070,13 +6052,13 @@
             </a:r>
           </a:p>
           <a:p>
-            <a:pPr>
+            <a:pPr algn="just">
               <a:spcAft>
                 <a:spcPts val="1000"/>
               </a:spcAft>
             </a:pPr>
             <a:r>
-              <a:rPr sz="1300" dirty="0">
+              <a:rPr sz="1300" b="0" dirty="0">
                 <a:latin typeface="Arial"/>
               </a:rPr>
               <a:t>• </a:t>
@@ -6085,23 +6067,23 @@
               <a:rPr sz="1300" b="1" dirty="0">
                 <a:latin typeface="Arial"/>
               </a:rPr>
-              <a:t>Dual-Pillar Structure: </a:t>
-            </a:r>
-            <a:r>
-              <a:rPr sz="1300" dirty="0">
-                <a:latin typeface="Arial"/>
-              </a:rPr>
-              <a:t>Combines retrospective enterprise catalog deduplication with forward-looking procurement intake guardrails.</a:t>
-            </a:r>
-          </a:p>
-          <a:p>
-            <a:pPr>
+              <a:t>Unified Material Translator: </a:t>
+            </a:r>
+            <a:r>
+              <a:rPr sz="1300" b="0" dirty="0">
+                <a:latin typeface="Arial"/>
+              </a:rPr>
+              <a:t>Connects different item codes across IOCL, ONGC, and BPCL into one shared, standard catalog without altering existing ERP systems.</a:t>
+            </a:r>
+          </a:p>
+          <a:p>
+            <a:pPr algn="just">
               <a:spcAft>
                 <a:spcPts val="1000"/>
               </a:spcAft>
             </a:pPr>
             <a:r>
-              <a:rPr sz="1300" dirty="0">
+              <a:rPr sz="1300" b="0" dirty="0">
                 <a:latin typeface="Arial"/>
               </a:rPr>
               <a:t>• </a:t>
@@ -6110,35 +6092,23 @@
               <a:rPr sz="1300" b="1" dirty="0">
                 <a:latin typeface="Arial"/>
               </a:rPr>
-              <a:t>Knowledge Graph Interlingua: </a:t>
-            </a:r>
-            <a:r>
-              <a:rPr sz="1300" dirty="0">
-                <a:latin typeface="Arial"/>
-              </a:rPr>
-              <a:t>Maps legacy SAP MM / Oracle material keys across IOCL, ONGC, and BPCL to canonical nodes linked to UNSPSC v26 and </a:t>
-            </a:r>
-            <a:r>
-              <a:rPr sz="1300" dirty="0" err="1">
-                <a:latin typeface="Arial"/>
-              </a:rPr>
-              <a:t>GeM</a:t>
-            </a:r>
-            <a:r>
-              <a:rPr sz="1300" dirty="0">
-                <a:latin typeface="Arial"/>
-              </a:rPr>
-              <a:t> taxonomies.</a:t>
-            </a:r>
-          </a:p>
-          <a:p>
-            <a:pPr>
+              <a:t>Smart Document Reading: </a:t>
+            </a:r>
+            <a:r>
+              <a:rPr sz="1300" b="0" dirty="0">
+                <a:latin typeface="Arial"/>
+              </a:rPr>
+              <a:t>Uses AI to automatically read and pull technical specifications from ERP dumps, scanned challans, and test certificates.</a:t>
+            </a:r>
+          </a:p>
+          <a:p>
+            <a:pPr algn="just">
               <a:spcAft>
                 <a:spcPts val="1000"/>
               </a:spcAft>
             </a:pPr>
             <a:r>
-              <a:rPr sz="1300" dirty="0">
+              <a:rPr sz="1300" b="0" dirty="0">
                 <a:latin typeface="Arial"/>
               </a:rPr>
               <a:t>• </a:t>
@@ -6147,13 +6117,13 @@
               <a:rPr sz="1300" b="1" dirty="0">
                 <a:latin typeface="Arial"/>
               </a:rPr>
-              <a:t>Safety-First Engineering Validation: </a:t>
-            </a:r>
-            <a:r>
-              <a:rPr sz="1300" dirty="0">
-                <a:latin typeface="Arial"/>
-              </a:rPr>
-              <a:t>Embeds a deterministic ASME B16.5 / ASTM tolerance verification engine to eliminate catastrophic false-positive substitutions in critical hydrocarbon process spares.</a:t>
+              <a:t>Safety-First Engineering Checks: </a:t>
+            </a:r>
+            <a:r>
+              <a:rPr sz="1300" b="0" dirty="0">
+                <a:latin typeface="Arial"/>
+              </a:rPr>
+              <a:t>Strictly verifies dimensions, pressure ratings, and steel grades so only 100% safe, compatible parts are recommended.</a:t>
             </a:r>
           </a:p>
         </p:txBody>
@@ -6173,7 +6143,7 @@
         <p:spPr>
           <a:xfrm>
             <a:off x="4279890" y="1439199"/>
-            <a:ext cx="3632219" cy="4389120"/>
+            <a:ext cx="3632219" cy="3323987"/>
           </a:xfrm>
           <a:prstGeom prst="rect">
             <a:avLst/>
@@ -6199,13 +6169,13 @@
             </a:r>
           </a:p>
           <a:p>
-            <a:pPr>
+            <a:pPr algn="just">
               <a:spcAft>
                 <a:spcPts val="1000"/>
               </a:spcAft>
             </a:pPr>
             <a:r>
-              <a:rPr sz="1300" dirty="0">
+              <a:rPr sz="1300" b="0" dirty="0">
                 <a:latin typeface="Arial"/>
               </a:rPr>
               <a:t>• </a:t>
@@ -6214,23 +6184,35 @@
               <a:rPr sz="1300" b="1" dirty="0">
                 <a:latin typeface="Arial"/>
               </a:rPr>
-              <a:t>Zero ERP Schema Migration: </a:t>
-            </a:r>
-            <a:r>
-              <a:rPr sz="1300" dirty="0">
-                <a:latin typeface="Arial"/>
-              </a:rPr>
-              <a:t>CPSEs retain familiar internal codes; system operates as a non-invasive semantic discovery overlay without database modifications.</a:t>
-            </a:r>
-          </a:p>
-          <a:p>
-            <a:pPr>
+              <a:t>Zero Disruption to Existing ERPs: </a:t>
+            </a:r>
+            <a:r>
+              <a:rPr sz="1300" b="0" dirty="0">
+                <a:latin typeface="Arial"/>
+              </a:rPr>
+              <a:t>Companies keep using their existing SAP/Oracle item codes—</a:t>
+            </a:r>
+            <a:r>
+              <a:rPr sz="1300" b="0" dirty="0" err="1">
+                <a:latin typeface="Arial"/>
+              </a:rPr>
+              <a:t>Samanvay</a:t>
+            </a:r>
+            <a:r>
+              <a:rPr sz="1300" b="0" dirty="0">
+                <a:latin typeface="Arial"/>
+              </a:rPr>
+              <a:t>-AI acts as an external smart layer with zero database changes.</a:t>
+            </a:r>
+          </a:p>
+          <a:p>
+            <a:pPr algn="just">
               <a:spcAft>
                 <a:spcPts val="1000"/>
               </a:spcAft>
             </a:pPr>
             <a:r>
-              <a:rPr sz="1300" dirty="0">
+              <a:rPr sz="1300" b="0" dirty="0">
                 <a:latin typeface="Arial"/>
               </a:rPr>
               <a:t>• </a:t>
@@ -6239,23 +6221,23 @@
               <a:rPr sz="1300" b="1" dirty="0">
                 <a:latin typeface="Arial"/>
               </a:rPr>
-              <a:t>Cross-Enterprise Spare Visibility: </a:t>
-            </a:r>
-            <a:r>
-              <a:rPr sz="1300" dirty="0">
-                <a:latin typeface="Arial"/>
-              </a:rPr>
-              <a:t>Discovers matching idle surplus across sister depots (e.g., ONGC Hazira having flanges IOCL Panipat needs), preventing redundant spot purchases.</a:t>
-            </a:r>
-          </a:p>
-          <a:p>
-            <a:pPr>
+              <a:t>Share Idle Spares Across Plants: </a:t>
+            </a:r>
+            <a:r>
+              <a:rPr sz="1300" b="0" dirty="0">
+                <a:latin typeface="Arial"/>
+              </a:rPr>
+              <a:t>Instantly spots unused surplus sitting in sister depots (e.g., ONGC Hazira has spares IOCL Panipat needs), avoiding redundant buying.</a:t>
+            </a:r>
+          </a:p>
+          <a:p>
+            <a:pPr algn="just">
               <a:spcAft>
                 <a:spcPts val="1000"/>
               </a:spcAft>
             </a:pPr>
             <a:r>
-              <a:rPr sz="1300" dirty="0">
+              <a:rPr sz="1300" b="0" dirty="0">
                 <a:latin typeface="Arial"/>
               </a:rPr>
               <a:t>• </a:t>
@@ -6264,7 +6246,7 @@
               <a:rPr sz="1300" b="1" dirty="0">
                 <a:latin typeface="Arial"/>
               </a:rPr>
-              <a:t>Consolidated </a:t>
+              <a:t>Combined Bulk Buying on </a:t>
             </a:r>
             <a:r>
               <a:rPr sz="1300" b="1" dirty="0" err="1">
@@ -6276,13 +6258,13 @@
               <a:rPr sz="1300" b="1" dirty="0">
                 <a:latin typeface="Arial"/>
               </a:rPr>
-              <a:t> Procurement: </a:t>
-            </a:r>
-            <a:r>
-              <a:rPr sz="1300" dirty="0">
-                <a:latin typeface="Arial"/>
-              </a:rPr>
-              <a:t>Standardized canonical master records aggregate enterprise demand to unlock bulk volume discounts through centralized public tenders.</a:t>
+              <a:t>: </a:t>
+            </a:r>
+            <a:r>
+              <a:rPr sz="1300" b="0" dirty="0">
+                <a:latin typeface="Arial"/>
+              </a:rPr>
+              <a:t>Combines common spare requirements across CPSEs to unlock high-volume bulk discounts on the Government e-Marketplace.</a:t>
             </a:r>
           </a:p>
         </p:txBody>
@@ -6302,7 +6284,7 @@
         <p:spPr>
           <a:xfrm>
             <a:off x="8155141" y="1439199"/>
-            <a:ext cx="3632219" cy="4389120"/>
+            <a:ext cx="3632219" cy="3123932"/>
           </a:xfrm>
           <a:prstGeom prst="rect">
             <a:avLst/>
@@ -6315,91 +6297,91 @@
           </a:bodyPr>
           <a:lstStyle/>
           <a:p>
-            <a:pPr>
+            <a:pPr algn="just">
               <a:spcAft>
                 <a:spcPts val="1000"/>
               </a:spcAft>
             </a:pPr>
             <a:r>
-              <a:rPr sz="1600" b="1">
+              <a:rPr sz="1600" b="1" dirty="0">
                 <a:latin typeface="Arial"/>
               </a:rPr>
               <a:t>Innovation &amp; Uniqueness</a:t>
             </a:r>
           </a:p>
           <a:p>
-            <a:pPr>
+            <a:pPr algn="just">
               <a:spcAft>
                 <a:spcPts val="1000"/>
               </a:spcAft>
             </a:pPr>
             <a:r>
-              <a:rPr sz="1300">
+              <a:rPr sz="1300" b="0" dirty="0">
                 <a:latin typeface="Arial"/>
               </a:rPr>
               <a:t>• </a:t>
             </a:r>
             <a:r>
-              <a:rPr sz="1300" b="1">
-                <a:latin typeface="Arial"/>
-              </a:rPr>
-              <a:t>Point-of-Origin Document Intake: </a:t>
-            </a:r>
-            <a:r>
-              <a:rPr sz="1300">
-                <a:latin typeface="Arial"/>
-              </a:rPr>
-              <a:t>Dual-path parser (PyMuPDF + PP-OCRv4) extracts mechanical specs directly from scanned Mill Test Certificates (MTCs) and delivery challans.</a:t>
-            </a:r>
-          </a:p>
-          <a:p>
-            <a:pPr>
+              <a:rPr sz="1300" b="1" dirty="0">
+                <a:latin typeface="Arial"/>
+              </a:rPr>
+              <a:t>Instant Certificate Intake: </a:t>
+            </a:r>
+            <a:r>
+              <a:rPr sz="1300" b="0" dirty="0">
+                <a:latin typeface="Arial"/>
+              </a:rPr>
+              <a:t>Smart OCR automatically extracts technical specs directly from scanned Mill Test Certificates (MTCs) and delivery slips in seconds.</a:t>
+            </a:r>
+          </a:p>
+          <a:p>
+            <a:pPr algn="just">
               <a:spcAft>
                 <a:spcPts val="1000"/>
               </a:spcAft>
             </a:pPr>
             <a:r>
-              <a:rPr sz="1300">
+              <a:rPr sz="1300" b="0" dirty="0">
                 <a:latin typeface="Arial"/>
               </a:rPr>
               <a:t>• </a:t>
             </a:r>
             <a:r>
-              <a:rPr sz="1300" b="1">
-                <a:latin typeface="Arial"/>
-              </a:rPr>
-              <a:t>Pre-Procurement Radar: </a:t>
-            </a:r>
-            <a:r>
-              <a:rPr sz="1300">
-                <a:latin typeface="Arial"/>
-              </a:rPr>
-              <a:t>Alerts procurement officers to identical idle inventory at nearby CPSE facilities before raising a new purchase requisition indent.</a:t>
-            </a:r>
-          </a:p>
-          <a:p>
-            <a:pPr>
+              <a:rPr sz="1300" b="1" dirty="0">
+                <a:latin typeface="Arial"/>
+              </a:rPr>
+              <a:t>Pre-Purchase Radar: </a:t>
+            </a:r>
+            <a:r>
+              <a:rPr sz="1300" b="0" dirty="0">
+                <a:latin typeface="Arial"/>
+              </a:rPr>
+              <a:t>Alerts purchase officers if an identical spare is already lying idle at a nearby depot before placing a costly new order.</a:t>
+            </a:r>
+          </a:p>
+          <a:p>
+            <a:pPr algn="just">
               <a:spcAft>
                 <a:spcPts val="1000"/>
               </a:spcAft>
             </a:pPr>
             <a:r>
-              <a:rPr sz="1300">
+              <a:rPr sz="1300" b="0" dirty="0">
                 <a:latin typeface="Arial"/>
               </a:rPr>
               <a:t>• </a:t>
             </a:r>
             <a:r>
-              <a:rPr sz="1300" b="1">
-                <a:latin typeface="Arial"/>
-              </a:rPr>
-              <a:t>Vectorized Deterministic Rules: </a:t>
-            </a:r>
-            <a:r>
-              <a:rPr sz="1300">
-                <a:latin typeface="Arial"/>
-              </a:rPr>
-              <a:t>Pure-Python Polars/NumPy validation enforces zero tolerance on size, pressure, and metallurgy upgrades, categorizing matches into Tier-1, Tier-2, and Tier-3.</a:t>
+              <a:rPr sz="1300" b="1" dirty="0">
+                <a:latin typeface="Arial"/>
+              </a:rPr>
+              <a:t>3-Tier Safety Rating: </a:t>
+            </a:r>
+            <a:r>
+              <a:rPr sz="1300" b="0" dirty="0">
+                <a:latin typeface="Arial"/>
+              </a:rPr>
+              <a:t>Categorizes every match into Tier-1 (Exact Match), Tier-2 (Safe Upgrade), or Tier-3 (Rejected/Unsafe) using strict engineering standards.</a:t>
             </a:r>
           </a:p>
         </p:txBody>
@@ -6648,37 +6630,37 @@
           <p:nvPr>
             <p:extLst>
               <p:ext uri="{D42A27DB-BD31-4B8C-83A1-F6EECF244321}">
-                <p14:modId xmlns:p14="http://schemas.microsoft.com/office/powerpoint/2010/main" val="307392109"/>
+                <p14:modId xmlns:p14="http://schemas.microsoft.com/office/powerpoint/2010/main" val="2594096567"/>
               </p:ext>
             </p:extLst>
           </p:nvPr>
         </p:nvGraphicFramePr>
         <p:xfrm>
-          <a:off x="110832" y="2842735"/>
-          <a:ext cx="5352462" cy="3474720"/>
+          <a:off x="236603" y="2902856"/>
+          <a:ext cx="5184054" cy="3447649"/>
         </p:xfrm>
         <a:graphic>
           <a:graphicData uri="http://schemas.openxmlformats.org/drawingml/2006/table">
             <a:tbl>
               <a:tblPr firstRow="1" bandRow="1">
-                <a:tableStyleId>{5C22544A-7EE6-4342-B048-85BDC9FD1C3A}</a:tableStyleId>
+                <a:tableStyleId>{7DF18680-E054-41AD-8BC1-D1AEF772440D}</a:tableStyleId>
               </a:tblPr>
               <a:tblGrid>
-                <a:gridCol w="1784154">
+                <a:gridCol w="1346627">
                   <a:extLst>
                     <a:ext uri="{9D8B030D-6E8A-4147-A177-3AD203B41FA5}">
                       <a16:colId xmlns:a16="http://schemas.microsoft.com/office/drawing/2014/main" val="3462056706"/>
                     </a:ext>
                   </a:extLst>
                 </a:gridCol>
-                <a:gridCol w="1784154">
+                <a:gridCol w="1873624">
                   <a:extLst>
                     <a:ext uri="{9D8B030D-6E8A-4147-A177-3AD203B41FA5}">
                       <a16:colId xmlns:a16="http://schemas.microsoft.com/office/drawing/2014/main" val="4132347978"/>
                     </a:ext>
                   </a:extLst>
                 </a:gridCol>
-                <a:gridCol w="1784154">
+                <a:gridCol w="1963803">
                   <a:extLst>
                     <a:ext uri="{9D8B030D-6E8A-4147-A177-3AD203B41FA5}">
                       <a16:colId xmlns:a16="http://schemas.microsoft.com/office/drawing/2014/main" val="3752152746"/>
@@ -6686,18 +6668,19 @@
                   </a:extLst>
                 </a:gridCol>
               </a:tblGrid>
-              <a:tr h="318776">
+              <a:tr h="396448">
                 <a:tc>
                   <a:txBody>
                     <a:bodyPr/>
                     <a:lstStyle/>
                     <a:p>
                       <a:r>
-                        <a:rPr sz="1100" b="1">
-                          <a:latin typeface="Arial"/>
-                        </a:rPr>
+                        <a:rPr sz="1100" b="1" dirty="0"/>
                         <a:t>Module</a:t>
                       </a:r>
+                      <a:endParaRPr sz="1100" b="1" dirty="0">
+                        <a:latin typeface="Arial"/>
+                      </a:endParaRPr>
                     </a:p>
                   </a:txBody>
                   <a:tcPr/>
@@ -6708,11 +6691,12 @@
                     <a:lstStyle/>
                     <a:p>
                       <a:r>
-                        <a:rPr sz="1100" b="1">
-                          <a:latin typeface="Arial"/>
-                        </a:rPr>
+                        <a:rPr sz="1100" b="1"/>
                         <a:t>Framework / Technology</a:t>
                       </a:r>
+                      <a:endParaRPr sz="1100" b="1">
+                        <a:latin typeface="Arial"/>
+                      </a:endParaRPr>
                     </a:p>
                   </a:txBody>
                   <a:tcPr/>
@@ -6723,11 +6707,12 @@
                     <a:lstStyle/>
                     <a:p>
                       <a:r>
-                        <a:rPr sz="1100" b="1" dirty="0">
-                          <a:latin typeface="Arial"/>
-                        </a:rPr>
+                        <a:rPr sz="1100" b="1" dirty="0"/>
                         <a:t>Role &amp; Functionality</a:t>
                       </a:r>
+                      <a:endParaRPr sz="1100" b="1" dirty="0">
+                        <a:latin typeface="Arial"/>
+                      </a:endParaRPr>
                     </a:p>
                   </a:txBody>
                   <a:tcPr/>
@@ -6738,18 +6723,19 @@
                   </a:ext>
                 </a:extLst>
               </a:tr>
-              <a:tr h="409855">
+              <a:tr h="509719">
                 <a:tc>
                   <a:txBody>
                     <a:bodyPr/>
                     <a:lstStyle/>
                     <a:p>
                       <a:r>
-                        <a:rPr sz="1000" b="1">
-                          <a:latin typeface="Arial"/>
-                        </a:rPr>
+                        <a:rPr sz="1000" b="1"/>
                         <a:t>API &amp; Gateway</a:t>
                       </a:r>
+                      <a:endParaRPr sz="1000" b="1">
+                        <a:latin typeface="Arial"/>
+                      </a:endParaRPr>
                     </a:p>
                   </a:txBody>
                   <a:tcPr/>
@@ -6760,11 +6746,24 @@
                     <a:lstStyle/>
                     <a:p>
                       <a:r>
-                        <a:rPr sz="1000" b="0">
-                          <a:latin typeface="Arial"/>
-                        </a:rPr>
-                        <a:t>FastAPI, Pydantic v2, SQLAlchemy</a:t>
+                        <a:rPr sz="1000" b="0" dirty="0" err="1"/>
+                        <a:t>FastAPI</a:t>
                       </a:r>
+                      <a:r>
+                        <a:rPr sz="1000" b="0" dirty="0"/>
+                        <a:t>, </a:t>
+                      </a:r>
+                      <a:r>
+                        <a:rPr sz="1000" b="0" dirty="0" err="1"/>
+                        <a:t>Pydantic</a:t>
+                      </a:r>
+                      <a:r>
+                        <a:rPr sz="1000" b="0" dirty="0"/>
+                        <a:t> v2, PostgreSQL</a:t>
+                      </a:r>
+                      <a:endParaRPr sz="1000" b="0" dirty="0">
+                        <a:latin typeface="Arial"/>
+                      </a:endParaRPr>
                     </a:p>
                   </a:txBody>
                   <a:tcPr/>
@@ -6775,11 +6774,12 @@
                     <a:lstStyle/>
                     <a:p>
                       <a:r>
-                        <a:rPr sz="1000" b="0">
-                          <a:latin typeface="Arial"/>
-                        </a:rPr>
-                        <a:t>Stateless REST routing, schema validation, RBAC &amp; audit logging</a:t>
+                        <a:rPr sz="1000" b="0"/>
+                        <a:t>Fast &amp; secure backend connection, data validation, and complete audit logging</a:t>
                       </a:r>
+                      <a:endParaRPr sz="1000" b="0">
+                        <a:latin typeface="Arial"/>
+                      </a:endParaRPr>
                     </a:p>
                   </a:txBody>
                   <a:tcPr/>
@@ -6790,18 +6790,19 @@
                   </a:ext>
                 </a:extLst>
               </a:tr>
-              <a:tr h="523704">
+              <a:tr h="509719">
                 <a:tc>
                   <a:txBody>
                     <a:bodyPr/>
                     <a:lstStyle/>
                     <a:p>
                       <a:r>
-                        <a:rPr sz="1000" b="1">
-                          <a:latin typeface="Arial"/>
-                        </a:rPr>
+                        <a:rPr sz="1000" b="1"/>
                         <a:t>AI &amp; Extraction</a:t>
                       </a:r>
+                      <a:endParaRPr sz="1000" b="1">
+                        <a:latin typeface="Arial"/>
+                      </a:endParaRPr>
                     </a:p>
                   </a:txBody>
                   <a:tcPr/>
@@ -6812,11 +6813,12 @@
                     <a:lstStyle/>
                     <a:p>
                       <a:r>
-                        <a:rPr sz="1000" b="0">
-                          <a:latin typeface="Arial"/>
-                        </a:rPr>
-                        <a:t>PaddleOCR (PP-OCRv4), PyMuPDF, DeBERTa-v3, BGE-M3</a:t>
+                        <a:rPr sz="1000" b="0"/>
+                        <a:t>PaddleOCR, PyMuPDF, DeBERTa-v3, BGE-M3</a:t>
                       </a:r>
+                      <a:endParaRPr sz="1000" b="0">
+                        <a:latin typeface="Arial"/>
+                      </a:endParaRPr>
                     </a:p>
                   </a:txBody>
                   <a:tcPr/>
@@ -6827,11 +6829,12 @@
                     <a:lstStyle/>
                     <a:p>
                       <a:r>
-                        <a:rPr sz="1000" b="0">
-                          <a:latin typeface="Arial"/>
-                        </a:rPr>
-                        <a:t>Dual-path MTC extraction, slot-filling NER &amp; dense vector candidate retrieval (&lt;15ms)</a:t>
+                        <a:rPr sz="1000" b="0"/>
+                        <a:t>Reads scanned certificates, pulls key technical specs, and finds matches in &lt;15ms</a:t>
                       </a:r>
+                      <a:endParaRPr sz="1000" b="0">
+                        <a:latin typeface="Arial"/>
+                      </a:endParaRPr>
                     </a:p>
                   </a:txBody>
                   <a:tcPr/>
@@ -6842,18 +6845,19 @@
                   </a:ext>
                 </a:extLst>
               </a:tr>
-              <a:tr h="523704">
+              <a:tr h="651307">
                 <a:tc>
                   <a:txBody>
                     <a:bodyPr/>
                     <a:lstStyle/>
                     <a:p>
                       <a:r>
-                        <a:rPr sz="1000" b="1">
-                          <a:latin typeface="Arial"/>
-                        </a:rPr>
+                        <a:rPr sz="1000" b="1"/>
                         <a:t>Deterministic Core</a:t>
                       </a:r>
+                      <a:endParaRPr sz="1000" b="1">
+                        <a:latin typeface="Arial"/>
+                      </a:endParaRPr>
                     </a:p>
                   </a:txBody>
                   <a:tcPr/>
@@ -6864,11 +6868,12 @@
                     <a:lstStyle/>
                     <a:p>
                       <a:r>
-                        <a:rPr sz="1000" b="0">
-                          <a:latin typeface="Arial"/>
-                        </a:rPr>
+                        <a:rPr sz="1000" b="0" dirty="0"/>
                         <a:t>Vectorized Python (Polars, NumPy)</a:t>
                       </a:r>
+                      <a:endParaRPr sz="1000" b="0" dirty="0">
+                        <a:latin typeface="Arial"/>
+                      </a:endParaRPr>
                     </a:p>
                   </a:txBody>
                   <a:tcPr/>
@@ -6879,11 +6884,12 @@
                     <a:lstStyle/>
                     <a:p>
                       <a:r>
-                        <a:rPr sz="1000" b="0">
-                          <a:latin typeface="Arial"/>
-                        </a:rPr>
-                        <a:t>Sub-millisecond ASME B16.5 &amp; ASTM alloy constraint checks and tiering</a:t>
+                        <a:rPr sz="1000" b="0" dirty="0"/>
+                        <a:t>Instant safety checks using strict engineering rules (ASME/ASTM) to prevent mismatches</a:t>
                       </a:r>
+                      <a:endParaRPr sz="1000" b="0" dirty="0">
+                        <a:latin typeface="Arial"/>
+                      </a:endParaRPr>
                     </a:p>
                   </a:txBody>
                   <a:tcPr/>
@@ -6894,18 +6900,19 @@
                   </a:ext>
                 </a:extLst>
               </a:tr>
-              <a:tr h="523704">
+              <a:tr h="651307">
                 <a:tc>
                   <a:txBody>
                     <a:bodyPr/>
                     <a:lstStyle/>
                     <a:p>
                       <a:r>
-                        <a:rPr sz="1000" b="1">
-                          <a:latin typeface="Arial"/>
-                        </a:rPr>
+                        <a:rPr sz="1000" b="1"/>
                         <a:t>Graph &amp; Vector DB</a:t>
                       </a:r>
+                      <a:endParaRPr sz="1000" b="1">
+                        <a:latin typeface="Arial"/>
+                      </a:endParaRPr>
                     </a:p>
                   </a:txBody>
                   <a:tcPr/>
@@ -6916,11 +6923,16 @@
                     <a:lstStyle/>
                     <a:p>
                       <a:r>
-                        <a:rPr sz="1000" b="0">
-                          <a:latin typeface="Arial"/>
-                        </a:rPr>
-                        <a:t>Neo4j (Bolt Driver), Qdrant, PostgreSQL</a:t>
+                        <a:rPr sz="1000" b="0" dirty="0"/>
+                        <a:t>Neo4j (Knowledge Graph), </a:t>
                       </a:r>
+                      <a:r>
+                        <a:rPr sz="1000" b="0" dirty="0" err="1"/>
+                        <a:t>Qdrant</a:t>
+                      </a:r>
+                      <a:endParaRPr sz="1000" b="0" dirty="0">
+                        <a:latin typeface="Arial"/>
+                      </a:endParaRPr>
                     </a:p>
                   </a:txBody>
                   <a:tcPr/>
@@ -6931,11 +6943,12 @@
                     <a:lstStyle/>
                     <a:p>
                       <a:r>
-                        <a:rPr sz="1000" b="0">
-                          <a:latin typeface="Arial"/>
-                        </a:rPr>
-                        <a:t>Cross-CPSE UNSPSC v26 / GeM ontology, HNSW vector index &amp; transaction audit</a:t>
+                        <a:rPr sz="1000" b="0"/>
+                        <a:t>Links parts across all CPSE catalogs, maps to GeM/UNSPSC, and tracks spare locations</a:t>
                       </a:r>
+                      <a:endParaRPr sz="1000" b="0">
+                        <a:latin typeface="Arial"/>
+                      </a:endParaRPr>
                     </a:p>
                   </a:txBody>
                   <a:tcPr/>
@@ -6946,18 +6959,19 @@
                   </a:ext>
                 </a:extLst>
               </a:tr>
-              <a:tr h="523704">
+              <a:tr h="651307">
                 <a:tc>
                   <a:txBody>
                     <a:bodyPr/>
                     <a:lstStyle/>
                     <a:p>
                       <a:r>
-                        <a:rPr sz="1000" b="1">
-                          <a:latin typeface="Arial"/>
-                        </a:rPr>
+                        <a:rPr sz="1000" b="1"/>
                         <a:t>Client Portal</a:t>
                       </a:r>
+                      <a:endParaRPr sz="1000" b="1">
+                        <a:latin typeface="Arial"/>
+                      </a:endParaRPr>
                     </a:p>
                   </a:txBody>
                   <a:tcPr/>
@@ -6968,11 +6982,24 @@
                     <a:lstStyle/>
                     <a:p>
                       <a:r>
-                        <a:rPr sz="1000" b="0">
-                          <a:latin typeface="Arial"/>
-                        </a:rPr>
-                        <a:t>Next.js 16, React 19, Tailwind CSS, shadcn/ui</a:t>
+                        <a:rPr sz="1000" b="0" dirty="0"/>
+                        <a:t>Next.js 16, React 19, Tailwind CSS, </a:t>
                       </a:r>
+                      <a:r>
+                        <a:rPr sz="1000" b="0" dirty="0" err="1"/>
+                        <a:t>shadcn</a:t>
+                      </a:r>
+                      <a:r>
+                        <a:rPr sz="1000" b="0" dirty="0"/>
+                        <a:t>/</a:t>
+                      </a:r>
+                      <a:r>
+                        <a:rPr sz="1000" b="0" dirty="0" err="1"/>
+                        <a:t>ui</a:t>
+                      </a:r>
+                      <a:endParaRPr sz="1000" b="0" dirty="0">
+                        <a:latin typeface="Arial"/>
+                      </a:endParaRPr>
                     </a:p>
                   </a:txBody>
                   <a:tcPr/>
@@ -6983,11 +7010,12 @@
                     <a:lstStyle/>
                     <a:p>
                       <a:r>
-                        <a:rPr sz="1000" b="0" dirty="0">
-                          <a:latin typeface="Arial"/>
-                        </a:rPr>
-                        <a:t>Catalog Deduplication Studio, HITL Triage Queue &amp; Procurement Analytics</a:t>
+                        <a:rPr sz="1000" b="0" dirty="0"/>
+                        <a:t>Easy web dashboard for batch catalog uploads, 1-click approvals, and savings analytics</a:t>
                       </a:r>
+                      <a:endParaRPr sz="1000" b="0" dirty="0">
+                        <a:latin typeface="Arial"/>
+                      </a:endParaRPr>
                     </a:p>
                   </a:txBody>
                   <a:tcPr/>
@@ -7016,7 +7044,7 @@
         </p:nvSpPr>
         <p:spPr>
           <a:xfrm>
-            <a:off x="1372826" y="2489140"/>
+            <a:off x="1414393" y="2521790"/>
             <a:ext cx="2828473" cy="369332"/>
           </a:xfrm>
           <a:prstGeom prst="rect">
@@ -7058,7 +7086,7 @@
         </p:nvSpPr>
         <p:spPr>
           <a:xfrm>
-            <a:off x="6204109" y="2489140"/>
+            <a:off x="6096000" y="2742767"/>
             <a:ext cx="5066982" cy="369332"/>
           </a:xfrm>
           <a:prstGeom prst="rect">
@@ -7100,7 +7128,7 @@
         </p:nvSpPr>
         <p:spPr>
           <a:xfrm>
-            <a:off x="5504862" y="2895779"/>
+            <a:off x="5504863" y="3085981"/>
             <a:ext cx="6465475" cy="2062103"/>
           </a:xfrm>
           <a:prstGeom prst="rect">
@@ -7120,7 +7148,7 @@
               </a:spcAft>
             </a:pPr>
             <a:r>
-              <a:rPr sz="1200" dirty="0">
+              <a:rPr sz="1200" b="0" dirty="0">
                 <a:latin typeface="Arial"/>
               </a:rPr>
               <a:t>• </a:t>
@@ -7129,31 +7157,13 @@
               <a:rPr sz="1200" b="1" dirty="0">
                 <a:latin typeface="Arial"/>
               </a:rPr>
-              <a:t>Contract-First Modular Architecture: </a:t>
-            </a:r>
-            <a:r>
-              <a:rPr sz="1200" dirty="0" err="1">
-                <a:latin typeface="Arial"/>
-              </a:rPr>
-              <a:t>FastAPI</a:t>
-            </a:r>
-            <a:r>
-              <a:rPr sz="1200" dirty="0">
-                <a:latin typeface="Arial"/>
-              </a:rPr>
-              <a:t> services, ML pipelines, and client portals interact via strictly typed </a:t>
-            </a:r>
-            <a:r>
-              <a:rPr sz="1200" dirty="0" err="1">
-                <a:latin typeface="Arial"/>
-              </a:rPr>
-              <a:t>Pydantic</a:t>
-            </a:r>
-            <a:r>
-              <a:rPr sz="1200" dirty="0">
-                <a:latin typeface="Arial"/>
-              </a:rPr>
-              <a:t> v2 data contracts, preventing build drag.</a:t>
+              <a:t>Modular &amp; Reliable Architecture: </a:t>
+            </a:r>
+            <a:r>
+              <a:rPr sz="1200" b="0" dirty="0">
+                <a:latin typeface="Arial"/>
+              </a:rPr>
+              <a:t>Clean separation between backend, AI models, and user interface ensures high performance and reliable operations.</a:t>
             </a:r>
           </a:p>
           <a:p>
@@ -7163,7 +7173,7 @@
               </a:spcAft>
             </a:pPr>
             <a:r>
-              <a:rPr sz="1200" dirty="0">
+              <a:rPr sz="1200" b="0" dirty="0">
                 <a:latin typeface="Arial"/>
               </a:rPr>
               <a:t>• </a:t>
@@ -7172,13 +7182,13 @@
               <a:rPr sz="1200" b="1" dirty="0">
                 <a:latin typeface="Arial"/>
               </a:rPr>
-              <a:t>Air-Gapped Sovereign Deployment: </a:t>
-            </a:r>
-            <a:r>
-              <a:rPr sz="1200" dirty="0">
-                <a:latin typeface="Arial"/>
-              </a:rPr>
-              <a:t>Zero reliance on external APIs; fully deployable on internal NIC/RailTel government private clouds using open-source models.</a:t>
+              <a:t>100% Private &amp; Sovereign Deployment: </a:t>
+            </a:r>
+            <a:r>
+              <a:rPr sz="1200" b="0" dirty="0">
+                <a:latin typeface="Arial"/>
+              </a:rPr>
+              <a:t>Runs entirely on secure government private cloud (NIC/RailTel) with zero external APIs—all sensitive data stays private.</a:t>
             </a:r>
           </a:p>
           <a:p>
@@ -7188,7 +7198,7 @@
               </a:spcAft>
             </a:pPr>
             <a:r>
-              <a:rPr sz="1200" dirty="0">
+              <a:rPr sz="1200" b="0" dirty="0">
                 <a:latin typeface="Arial"/>
               </a:rPr>
               <a:t>• </a:t>
@@ -7197,13 +7207,13 @@
               <a:rPr sz="1200" b="1" dirty="0">
                 <a:latin typeface="Arial"/>
               </a:rPr>
-              <a:t>Human-in-the-Loop (HITL) Active Learning: </a:t>
-            </a:r>
-            <a:r>
-              <a:rPr sz="1200" dirty="0">
-                <a:latin typeface="Arial"/>
-              </a:rPr>
-              <a:t>Auto-links high-confidence matches (&gt;=90%); routes borderline cases (70%-90%) to catalog officers with side-by-side invariant checks.</a:t>
+              <a:t>Human-in-the-Loop Review: </a:t>
+            </a:r>
+            <a:r>
+              <a:rPr sz="1200" b="0" dirty="0">
+                <a:latin typeface="Arial"/>
+              </a:rPr>
+              <a:t>Auto-approves clear matches (≥90%), while borderline cases (70%–90%) are shown side-by-side for quick 1-click human approval.</a:t>
             </a:r>
           </a:p>
           <a:p>
@@ -7213,7 +7223,7 @@
               </a:spcAft>
             </a:pPr>
             <a:r>
-              <a:rPr sz="1200" dirty="0">
+              <a:rPr sz="1200" b="0" dirty="0">
                 <a:latin typeface="Arial"/>
               </a:rPr>
               <a:t>• </a:t>
@@ -7222,47 +7232,530 @@
               <a:rPr sz="1200" b="1" dirty="0">
                 <a:latin typeface="Arial"/>
               </a:rPr>
-              <a:t>Non-Invasive Read-Only Connectors: </a:t>
-            </a:r>
-            <a:r>
-              <a:rPr sz="1200" dirty="0">
-                <a:latin typeface="Arial"/>
-              </a:rPr>
-              <a:t>Ingests SAP MM (.xlsx/csv) and Oracle dumps off-peak via read-only hooks without disrupting live transactional ERP operations.</a:t>
-            </a:r>
-          </a:p>
-        </p:txBody>
-      </p:sp>
-      <p:pic>
-        <p:nvPicPr>
-          <p:cNvPr id="16" name="Picture 15">
+              <a:t>Safe, Plug-and-Play Integration: </a:t>
+            </a:r>
+            <a:r>
+              <a:rPr sz="1200" b="0" dirty="0">
+                <a:latin typeface="Arial"/>
+              </a:rPr>
+              <a:t>Reads data securely from SAP MM / Oracle dumps without altering live transactional databases, guaranteeing zero operational risk.</a:t>
+            </a:r>
+          </a:p>
+        </p:txBody>
+      </p:sp>
+      <p:sp>
+        <p:nvSpPr>
+          <p:cNvPr id="7" name="TextBox 6">
             <a:extLst>
               <a:ext uri="{FF2B5EF4-FFF2-40B4-BE49-F238E27FC236}">
-                <a16:creationId xmlns:a16="http://schemas.microsoft.com/office/drawing/2014/main" id="{6195A06F-4873-B227-9F5E-45499FA77103}"/>
+                <a16:creationId xmlns:a16="http://schemas.microsoft.com/office/drawing/2014/main" id="{BF5B2739-A958-CCBC-0BDC-22965C0090E8}"/>
               </a:ext>
             </a:extLst>
           </p:cNvPr>
-          <p:cNvPicPr>
-            <a:picLocks noChangeAspect="1"/>
-          </p:cNvPicPr>
+          <p:cNvSpPr txBox="1"/>
           <p:nvPr/>
-        </p:nvPicPr>
-        <p:blipFill>
-          <a:blip r:embed="rId4"/>
-          <a:stretch>
-            <a:fillRect/>
-          </a:stretch>
-        </p:blipFill>
+        </p:nvSpPr>
         <p:spPr>
           <a:xfrm>
-            <a:off x="329773" y="1175960"/>
-            <a:ext cx="11159453" cy="1374266"/>
+            <a:off x="329773" y="1095375"/>
+            <a:ext cx="2515563" cy="1446550"/>
           </a:xfrm>
           <a:prstGeom prst="rect">
             <a:avLst/>
           </a:prstGeom>
+          <a:noFill/>
         </p:spPr>
-      </p:pic>
+        <p:txBody>
+          <a:bodyPr wrap="square" rtlCol="0">
+            <a:spAutoFit/>
+          </a:bodyPr>
+          <a:lstStyle/>
+          <a:p>
+            <a:r>
+              <a:rPr lang="en-US" sz="1100" dirty="0">
+                <a:latin typeface="Arial" panose="020B0604020202020204" pitchFamily="34" charset="0"/>
+                <a:cs typeface="Arial" panose="020B0604020202020204" pitchFamily="34" charset="0"/>
+              </a:rPr>
+              <a:t> </a:t>
+            </a:r>
+            <a:r>
+              <a:rPr lang="en-US" sz="1050" dirty="0">
+                <a:latin typeface="Arial" panose="020B0604020202020204" pitchFamily="34" charset="0"/>
+                <a:cs typeface="Arial" panose="020B0604020202020204" pitchFamily="34" charset="0"/>
+              </a:rPr>
+              <a:t>Stage 01: Smart Document Intake</a:t>
+            </a:r>
+          </a:p>
+          <a:p>
+            <a:pPr marL="171450" indent="-171450" algn="just">
+              <a:buFont typeface="Arial" panose="020B0604020202020204" pitchFamily="34" charset="0"/>
+              <a:buChar char="•"/>
+            </a:pPr>
+            <a:r>
+              <a:rPr lang="en-IN" sz="1050" dirty="0">
+                <a:latin typeface="Arial" panose="020B0604020202020204" pitchFamily="34" charset="0"/>
+                <a:cs typeface="Arial" panose="020B0604020202020204" pitchFamily="34" charset="0"/>
+              </a:rPr>
+              <a:t>Dual-path parsing: Digital PDFs &amp; scanned certificates (MTCs).</a:t>
+            </a:r>
+          </a:p>
+          <a:p>
+            <a:pPr marL="171450" indent="-171450" algn="just">
+              <a:buFont typeface="Arial" panose="020B0604020202020204" pitchFamily="34" charset="0"/>
+              <a:buChar char="•"/>
+            </a:pPr>
+            <a:r>
+              <a:rPr lang="en-IN" sz="1050" dirty="0" err="1">
+                <a:latin typeface="Arial" panose="020B0604020202020204" pitchFamily="34" charset="0"/>
+                <a:cs typeface="Arial" panose="020B0604020202020204" pitchFamily="34" charset="0"/>
+              </a:rPr>
+              <a:t>PaddleOCR</a:t>
+            </a:r>
+            <a:r>
+              <a:rPr lang="en-IN" sz="1050" dirty="0">
+                <a:latin typeface="Arial" panose="020B0604020202020204" pitchFamily="34" charset="0"/>
+                <a:cs typeface="Arial" panose="020B0604020202020204" pitchFamily="34" charset="0"/>
+              </a:rPr>
+              <a:t> + </a:t>
+            </a:r>
+            <a:r>
+              <a:rPr lang="en-IN" sz="1050" dirty="0" err="1">
+                <a:latin typeface="Arial" panose="020B0604020202020204" pitchFamily="34" charset="0"/>
+                <a:cs typeface="Arial" panose="020B0604020202020204" pitchFamily="34" charset="0"/>
+              </a:rPr>
+              <a:t>PyMuPDF</a:t>
+            </a:r>
+            <a:r>
+              <a:rPr lang="en-IN" sz="1050" dirty="0">
+                <a:latin typeface="Arial" panose="020B0604020202020204" pitchFamily="34" charset="0"/>
+                <a:cs typeface="Arial" panose="020B0604020202020204" pitchFamily="34" charset="0"/>
+              </a:rPr>
+              <a:t>: Handles rotated &amp; blurry scans in &lt; 50 </a:t>
+            </a:r>
+            <a:r>
+              <a:rPr lang="en-IN" sz="1050" dirty="0" err="1">
+                <a:latin typeface="Arial" panose="020B0604020202020204" pitchFamily="34" charset="0"/>
+                <a:cs typeface="Arial" panose="020B0604020202020204" pitchFamily="34" charset="0"/>
+              </a:rPr>
+              <a:t>ms</a:t>
+            </a:r>
+            <a:r>
+              <a:rPr lang="en-IN" sz="1050" dirty="0">
+                <a:latin typeface="Arial" panose="020B0604020202020204" pitchFamily="34" charset="0"/>
+                <a:cs typeface="Arial" panose="020B0604020202020204" pitchFamily="34" charset="0"/>
+              </a:rPr>
+              <a:t>.</a:t>
+            </a:r>
+          </a:p>
+          <a:p>
+            <a:pPr marL="171450" indent="-171450" algn="just">
+              <a:buFont typeface="Arial" panose="020B0604020202020204" pitchFamily="34" charset="0"/>
+              <a:buChar char="•"/>
+            </a:pPr>
+            <a:r>
+              <a:rPr lang="en-IN" sz="1050" dirty="0">
+                <a:latin typeface="Arial" panose="020B0604020202020204" pitchFamily="34" charset="0"/>
+                <a:cs typeface="Arial" panose="020B0604020202020204" pitchFamily="34" charset="0"/>
+              </a:rPr>
+              <a:t>Text normalizer: Standardizes units, sizes, and messy enterprise dialects.</a:t>
+            </a:r>
+          </a:p>
+        </p:txBody>
+      </p:sp>
+      <p:sp>
+        <p:nvSpPr>
+          <p:cNvPr id="8" name="TextBox 7">
+            <a:extLst>
+              <a:ext uri="{FF2B5EF4-FFF2-40B4-BE49-F238E27FC236}">
+                <a16:creationId xmlns:a16="http://schemas.microsoft.com/office/drawing/2014/main" id="{3619818F-955B-ABE6-9496-FC2BF705396F}"/>
+              </a:ext>
+            </a:extLst>
+          </p:cNvPr>
+          <p:cNvSpPr txBox="1"/>
+          <p:nvPr/>
+        </p:nvSpPr>
+        <p:spPr>
+          <a:xfrm>
+            <a:off x="3188084" y="1079254"/>
+            <a:ext cx="2515563" cy="1384995"/>
+          </a:xfrm>
+          <a:prstGeom prst="rect">
+            <a:avLst/>
+          </a:prstGeom>
+          <a:noFill/>
+        </p:spPr>
+        <p:txBody>
+          <a:bodyPr wrap="square" rtlCol="0">
+            <a:spAutoFit/>
+          </a:bodyPr>
+          <a:lstStyle/>
+          <a:p>
+            <a:r>
+              <a:rPr lang="en-US" sz="1050" dirty="0">
+                <a:latin typeface="Arial" panose="020B0604020202020204" pitchFamily="34" charset="0"/>
+                <a:cs typeface="Arial" panose="020B0604020202020204" pitchFamily="34" charset="0"/>
+              </a:rPr>
+              <a:t>Stage 02: AI Spec Extraction &amp; Search</a:t>
+            </a:r>
+          </a:p>
+          <a:p>
+            <a:pPr marL="171450" indent="-171450" algn="just">
+              <a:buFont typeface="Arial" panose="020B0604020202020204" pitchFamily="34" charset="0"/>
+              <a:buChar char="•"/>
+            </a:pPr>
+            <a:r>
+              <a:rPr lang="en-US" sz="1050" dirty="0">
+                <a:latin typeface="Arial" panose="020B0604020202020204" pitchFamily="34" charset="0"/>
+                <a:cs typeface="Arial" panose="020B0604020202020204" pitchFamily="34" charset="0"/>
+              </a:rPr>
+              <a:t>DeBERTa-v3 AI: Extracts Item Type, Size, Rating &amp; Metallurgy.</a:t>
+            </a:r>
+          </a:p>
+          <a:p>
+            <a:pPr marL="171450" indent="-171450" algn="just">
+              <a:buFont typeface="Arial" panose="020B0604020202020204" pitchFamily="34" charset="0"/>
+              <a:buChar char="•"/>
+            </a:pPr>
+            <a:r>
+              <a:rPr lang="en-US" sz="1050" dirty="0">
+                <a:latin typeface="Arial" panose="020B0604020202020204" pitchFamily="34" charset="0"/>
+                <a:cs typeface="Arial" panose="020B0604020202020204" pitchFamily="34" charset="0"/>
+              </a:rPr>
+              <a:t>BGE-M3 + </a:t>
+            </a:r>
+            <a:r>
+              <a:rPr lang="en-US" sz="1050" dirty="0" err="1">
+                <a:latin typeface="Arial" panose="020B0604020202020204" pitchFamily="34" charset="0"/>
+                <a:cs typeface="Arial" panose="020B0604020202020204" pitchFamily="34" charset="0"/>
+              </a:rPr>
+              <a:t>Qdrant</a:t>
+            </a:r>
+            <a:r>
+              <a:rPr lang="en-US" sz="1050" dirty="0">
+                <a:latin typeface="Arial" panose="020B0604020202020204" pitchFamily="34" charset="0"/>
+                <a:cs typeface="Arial" panose="020B0604020202020204" pitchFamily="34" charset="0"/>
+              </a:rPr>
+              <a:t>: Fast semantic vector search in &lt; 15 </a:t>
+            </a:r>
+            <a:r>
+              <a:rPr lang="en-US" sz="1050" dirty="0" err="1">
+                <a:latin typeface="Arial" panose="020B0604020202020204" pitchFamily="34" charset="0"/>
+                <a:cs typeface="Arial" panose="020B0604020202020204" pitchFamily="34" charset="0"/>
+              </a:rPr>
+              <a:t>ms.</a:t>
+            </a:r>
+            <a:endParaRPr lang="en-US" sz="1050" dirty="0">
+              <a:latin typeface="Arial" panose="020B0604020202020204" pitchFamily="34" charset="0"/>
+              <a:cs typeface="Arial" panose="020B0604020202020204" pitchFamily="34" charset="0"/>
+            </a:endParaRPr>
+          </a:p>
+          <a:p>
+            <a:pPr marL="171450" indent="-171450" algn="just">
+              <a:buFont typeface="Arial" panose="020B0604020202020204" pitchFamily="34" charset="0"/>
+              <a:buChar char="•"/>
+            </a:pPr>
+            <a:r>
+              <a:rPr lang="en-US" sz="1050" dirty="0">
+                <a:latin typeface="Arial" panose="020B0604020202020204" pitchFamily="34" charset="0"/>
+                <a:cs typeface="Arial" panose="020B0604020202020204" pitchFamily="34" charset="0"/>
+              </a:rPr>
+              <a:t>Bridges dialects: Unifies abbreviations across IOCL, ONGC &amp; BPCL.</a:t>
+            </a:r>
+            <a:endParaRPr lang="en-IN" sz="1050" dirty="0">
+              <a:latin typeface="Arial" panose="020B0604020202020204" pitchFamily="34" charset="0"/>
+              <a:cs typeface="Arial" panose="020B0604020202020204" pitchFamily="34" charset="0"/>
+            </a:endParaRPr>
+          </a:p>
+        </p:txBody>
+      </p:sp>
+      <p:sp>
+        <p:nvSpPr>
+          <p:cNvPr id="9" name="TextBox 8">
+            <a:extLst>
+              <a:ext uri="{FF2B5EF4-FFF2-40B4-BE49-F238E27FC236}">
+                <a16:creationId xmlns:a16="http://schemas.microsoft.com/office/drawing/2014/main" id="{76273E4F-68FE-DDD8-6E36-ADBF4F530F5E}"/>
+              </a:ext>
+            </a:extLst>
+          </p:cNvPr>
+          <p:cNvSpPr txBox="1"/>
+          <p:nvPr/>
+        </p:nvSpPr>
+        <p:spPr>
+          <a:xfrm>
+            <a:off x="6046395" y="1087023"/>
+            <a:ext cx="2515563" cy="1384995"/>
+          </a:xfrm>
+          <a:prstGeom prst="rect">
+            <a:avLst/>
+          </a:prstGeom>
+          <a:noFill/>
+        </p:spPr>
+        <p:txBody>
+          <a:bodyPr wrap="square" rtlCol="0">
+            <a:spAutoFit/>
+          </a:bodyPr>
+          <a:lstStyle/>
+          <a:p>
+            <a:r>
+              <a:rPr lang="en-US" sz="1050" dirty="0">
+                <a:latin typeface="Arial" panose="020B0604020202020204" pitchFamily="34" charset="0"/>
+                <a:cs typeface="Arial" panose="020B0604020202020204" pitchFamily="34" charset="0"/>
+              </a:rPr>
+              <a:t> Stage 03: Engineering Safety Rules</a:t>
+            </a:r>
+          </a:p>
+          <a:p>
+            <a:pPr marL="171450" indent="-171450" algn="just">
+              <a:buFont typeface="Arial" panose="020B0604020202020204" pitchFamily="34" charset="0"/>
+              <a:buChar char="•"/>
+            </a:pPr>
+            <a:r>
+              <a:rPr lang="en-US" sz="1050" dirty="0">
+                <a:latin typeface="Arial" panose="020B0604020202020204" pitchFamily="34" charset="0"/>
+                <a:cs typeface="Arial" panose="020B0604020202020204" pitchFamily="34" charset="0"/>
+              </a:rPr>
+              <a:t>ASME / ASTM rules: Zero-tolerance size &amp; pressure rating checks.</a:t>
+            </a:r>
+          </a:p>
+          <a:p>
+            <a:pPr marL="171450" indent="-171450" algn="just">
+              <a:buFont typeface="Arial" panose="020B0604020202020204" pitchFamily="34" charset="0"/>
+              <a:buChar char="•"/>
+            </a:pPr>
+            <a:r>
+              <a:rPr lang="en-US" sz="1050" dirty="0">
+                <a:latin typeface="Arial" panose="020B0604020202020204" pitchFamily="34" charset="0"/>
+                <a:cs typeface="Arial" panose="020B0604020202020204" pitchFamily="34" charset="0"/>
+              </a:rPr>
+              <a:t>Prevents accidents: Overrides AI to block unsafe part mismatches.</a:t>
+            </a:r>
+          </a:p>
+          <a:p>
+            <a:pPr marL="171450" indent="-171450" algn="just">
+              <a:buFont typeface="Arial" panose="020B0604020202020204" pitchFamily="34" charset="0"/>
+              <a:buChar char="•"/>
+            </a:pPr>
+            <a:r>
+              <a:rPr lang="en-US" sz="1050" dirty="0">
+                <a:latin typeface="Arial" panose="020B0604020202020204" pitchFamily="34" charset="0"/>
+                <a:cs typeface="Arial" panose="020B0604020202020204" pitchFamily="34" charset="0"/>
+              </a:rPr>
+              <a:t>3-Tier safety tags: Tier-1 (Exact Match), Tier-2 (Upgrade), Tier-3 (Reject).</a:t>
+            </a:r>
+            <a:endParaRPr lang="en-IN" sz="1050" dirty="0">
+              <a:latin typeface="Arial" panose="020B0604020202020204" pitchFamily="34" charset="0"/>
+              <a:cs typeface="Arial" panose="020B0604020202020204" pitchFamily="34" charset="0"/>
+            </a:endParaRPr>
+          </a:p>
+        </p:txBody>
+      </p:sp>
+      <p:sp>
+        <p:nvSpPr>
+          <p:cNvPr id="13" name="TextBox 12">
+            <a:extLst>
+              <a:ext uri="{FF2B5EF4-FFF2-40B4-BE49-F238E27FC236}">
+                <a16:creationId xmlns:a16="http://schemas.microsoft.com/office/drawing/2014/main" id="{B11F2F96-1B1E-6E5F-F330-149A9651EAA9}"/>
+              </a:ext>
+            </a:extLst>
+          </p:cNvPr>
+          <p:cNvSpPr txBox="1"/>
+          <p:nvPr/>
+        </p:nvSpPr>
+        <p:spPr>
+          <a:xfrm>
+            <a:off x="8841785" y="1059580"/>
+            <a:ext cx="2515563" cy="1708160"/>
+          </a:xfrm>
+          <a:prstGeom prst="rect">
+            <a:avLst/>
+          </a:prstGeom>
+          <a:noFill/>
+        </p:spPr>
+        <p:txBody>
+          <a:bodyPr wrap="square" rtlCol="0">
+            <a:spAutoFit/>
+          </a:bodyPr>
+          <a:lstStyle/>
+          <a:p>
+            <a:r>
+              <a:rPr lang="en-US" sz="1050" dirty="0">
+                <a:latin typeface="Arial" panose="020B0604020202020204" pitchFamily="34" charset="0"/>
+                <a:cs typeface="Arial" panose="020B0604020202020204" pitchFamily="34" charset="0"/>
+              </a:rPr>
+              <a:t>Stage 04: Cross-CPSE Sharing &amp; Portal </a:t>
+            </a:r>
+          </a:p>
+          <a:p>
+            <a:pPr marL="171450" indent="-171450" algn="just">
+              <a:buFont typeface="Arial" panose="020B0604020202020204" pitchFamily="34" charset="0"/>
+              <a:buChar char="•"/>
+            </a:pPr>
+            <a:r>
+              <a:rPr lang="en-US" sz="1050" dirty="0">
+                <a:latin typeface="Arial" panose="020B0604020202020204" pitchFamily="34" charset="0"/>
+                <a:cs typeface="Arial" panose="020B0604020202020204" pitchFamily="34" charset="0"/>
+              </a:rPr>
+              <a:t>Neo4j Knowledge Graph: Locates idle surplus spares at sister depots.</a:t>
+            </a:r>
+          </a:p>
+          <a:p>
+            <a:pPr marL="171450" indent="-171450" algn="just">
+              <a:buFont typeface="Arial" panose="020B0604020202020204" pitchFamily="34" charset="0"/>
+              <a:buChar char="•"/>
+            </a:pPr>
+            <a:r>
+              <a:rPr lang="en-US" sz="1050" dirty="0" err="1">
+                <a:latin typeface="Arial" panose="020B0604020202020204" pitchFamily="34" charset="0"/>
+                <a:cs typeface="Arial" panose="020B0604020202020204" pitchFamily="34" charset="0"/>
+              </a:rPr>
+              <a:t>GeM</a:t>
+            </a:r>
+            <a:r>
+              <a:rPr lang="en-US" sz="1050" dirty="0">
+                <a:latin typeface="Arial" panose="020B0604020202020204" pitchFamily="34" charset="0"/>
+                <a:cs typeface="Arial" panose="020B0604020202020204" pitchFamily="34" charset="0"/>
+              </a:rPr>
+              <a:t> &amp; UNSPSC mapping: Aggregates demand across CPSEs for bulk volume savings.</a:t>
+            </a:r>
+          </a:p>
+          <a:p>
+            <a:pPr marL="171450" indent="-171450" algn="just">
+              <a:buFont typeface="Arial" panose="020B0604020202020204" pitchFamily="34" charset="0"/>
+              <a:buChar char="•"/>
+            </a:pPr>
+            <a:r>
+              <a:rPr lang="en-US" sz="1050" dirty="0">
+                <a:latin typeface="Arial" panose="020B0604020202020204" pitchFamily="34" charset="0"/>
+                <a:cs typeface="Arial" panose="020B0604020202020204" pitchFamily="34" charset="0"/>
+              </a:rPr>
+              <a:t>Next.js Web Dashboard: Real-time procurement analytics and 1-click approvals.</a:t>
+            </a:r>
+            <a:endParaRPr lang="en-IN" sz="1050" dirty="0">
+              <a:latin typeface="Arial" panose="020B0604020202020204" pitchFamily="34" charset="0"/>
+              <a:cs typeface="Arial" panose="020B0604020202020204" pitchFamily="34" charset="0"/>
+            </a:endParaRPr>
+          </a:p>
+        </p:txBody>
+      </p:sp>
+      <p:cxnSp>
+        <p:nvCxnSpPr>
+          <p:cNvPr id="15" name="Straight Arrow Connector 14">
+            <a:extLst>
+              <a:ext uri="{FF2B5EF4-FFF2-40B4-BE49-F238E27FC236}">
+                <a16:creationId xmlns:a16="http://schemas.microsoft.com/office/drawing/2014/main" id="{C8F75503-0B78-7B7F-8268-3FA84292A280}"/>
+              </a:ext>
+            </a:extLst>
+          </p:cNvPr>
+          <p:cNvCxnSpPr>
+            <a:stCxn id="7" idx="3"/>
+          </p:cNvCxnSpPr>
+          <p:nvPr/>
+        </p:nvCxnSpPr>
+        <p:spPr>
+          <a:xfrm>
+            <a:off x="2845336" y="1818650"/>
+            <a:ext cx="471605" cy="0"/>
+          </a:xfrm>
+          <a:prstGeom prst="straightConnector1">
+            <a:avLst/>
+          </a:prstGeom>
+          <a:ln>
+            <a:tailEnd type="triangle"/>
+          </a:ln>
+        </p:spPr>
+        <p:style>
+          <a:lnRef idx="2">
+            <a:schemeClr val="dk1"/>
+          </a:lnRef>
+          <a:fillRef idx="0">
+            <a:schemeClr val="dk1"/>
+          </a:fillRef>
+          <a:effectRef idx="1">
+            <a:schemeClr val="dk1"/>
+          </a:effectRef>
+          <a:fontRef idx="minor">
+            <a:schemeClr val="tx1"/>
+          </a:fontRef>
+        </p:style>
+      </p:cxnSp>
+      <p:cxnSp>
+        <p:nvCxnSpPr>
+          <p:cNvPr id="17" name="Straight Arrow Connector 16">
+            <a:extLst>
+              <a:ext uri="{FF2B5EF4-FFF2-40B4-BE49-F238E27FC236}">
+                <a16:creationId xmlns:a16="http://schemas.microsoft.com/office/drawing/2014/main" id="{8B80E306-C59A-C5DA-606E-B5C6578C6DF1}"/>
+              </a:ext>
+            </a:extLst>
+          </p:cNvPr>
+          <p:cNvCxnSpPr/>
+          <p:nvPr/>
+        </p:nvCxnSpPr>
+        <p:spPr>
+          <a:xfrm>
+            <a:off x="5624395" y="1818650"/>
+            <a:ext cx="471605" cy="0"/>
+          </a:xfrm>
+          <a:prstGeom prst="straightConnector1">
+            <a:avLst/>
+          </a:prstGeom>
+          <a:ln>
+            <a:tailEnd type="triangle"/>
+          </a:ln>
+        </p:spPr>
+        <p:style>
+          <a:lnRef idx="2">
+            <a:schemeClr val="dk1"/>
+          </a:lnRef>
+          <a:fillRef idx="0">
+            <a:schemeClr val="dk1"/>
+          </a:fillRef>
+          <a:effectRef idx="1">
+            <a:schemeClr val="dk1"/>
+          </a:effectRef>
+          <a:fontRef idx="minor">
+            <a:schemeClr val="tx1"/>
+          </a:fontRef>
+        </p:style>
+      </p:cxnSp>
+      <p:cxnSp>
+        <p:nvCxnSpPr>
+          <p:cNvPr id="18" name="Straight Arrow Connector 17">
+            <a:extLst>
+              <a:ext uri="{FF2B5EF4-FFF2-40B4-BE49-F238E27FC236}">
+                <a16:creationId xmlns:a16="http://schemas.microsoft.com/office/drawing/2014/main" id="{A5238313-1D92-9369-6744-6E7EAD2985A0}"/>
+              </a:ext>
+            </a:extLst>
+          </p:cNvPr>
+          <p:cNvCxnSpPr/>
+          <p:nvPr/>
+        </p:nvCxnSpPr>
+        <p:spPr>
+          <a:xfrm>
+            <a:off x="8393688" y="1818650"/>
+            <a:ext cx="471605" cy="0"/>
+          </a:xfrm>
+          <a:prstGeom prst="straightConnector1">
+            <a:avLst/>
+          </a:prstGeom>
+          <a:ln>
+            <a:tailEnd type="triangle"/>
+          </a:ln>
+        </p:spPr>
+        <p:style>
+          <a:lnRef idx="2">
+            <a:schemeClr val="dk1"/>
+          </a:lnRef>
+          <a:fillRef idx="0">
+            <a:schemeClr val="dk1"/>
+          </a:fillRef>
+          <a:effectRef idx="1">
+            <a:schemeClr val="dk1"/>
+          </a:effectRef>
+          <a:fontRef idx="minor">
+            <a:schemeClr val="tx1"/>
+          </a:fontRef>
+        </p:style>
+      </p:cxnSp>
     </p:spTree>
   </p:cSld>
   <p:clrMapOvr>
@@ -7588,17 +8081,17 @@
           <a:p>
             <a:pPr algn="just"/>
             <a:r>
-              <a:rPr sz="1500" b="1">
+              <a:rPr sz="1500" b="1" dirty="0">
                 <a:latin typeface="Arial"/>
               </a:rPr>
               <a:t>Technical Scalability
 </a:t>
             </a:r>
             <a:r>
-              <a:rPr sz="1200">
-                <a:latin typeface="Arial"/>
-              </a:rPr>
-              <a:t>HNSW vector indexing in Qdrant delivers sub-15ms candidate retrieval across 10M+ SKUs; vectorized Polars rules ensure instant ASME safety checks.</a:t>
+              <a:rPr sz="1200" b="0" dirty="0">
+                <a:latin typeface="Arial"/>
+              </a:rPr>
+              <a:t>Searches through 10+ million spare parts in under 15 milliseconds, handling large enterprise catalog uploads with instant safety checks.</a:t>
             </a:r>
           </a:p>
         </p:txBody>
@@ -7636,14 +8129,14 @@
               <a:rPr sz="1500" b="1">
                 <a:latin typeface="Arial"/>
               </a:rPr>
-              <a:t>Operational Adaptability
+              <a:t>Operational Ease
 </a:t>
             </a:r>
             <a:r>
-              <a:rPr sz="1200">
-                <a:latin typeface="Arial"/>
-              </a:rPr>
-              <a:t>Dual-path document engine parses native digital PDFs (&lt;50ms) and low-res scanned challans; web studio enables rapid zero-training adoption by depot staff.</a:t>
+              <a:rPr sz="1200" b="0">
+                <a:latin typeface="Arial"/>
+              </a:rPr>
+              <a:t>Reads both clear digital PDFs and blurry mobile scans; intuitive web dashboard requires zero special training for warehouse and plant staff.</a:t>
             </a:r>
             <a:endParaRPr lang="en-IN" sz="1600" b="1" dirty="0">
               <a:latin typeface="Arial" panose="020B0604020202020204" pitchFamily="34" charset="0"/>
@@ -7688,10 +8181,10 @@
 </a:t>
             </a:r>
             <a:r>
-              <a:rPr sz="1200">
-                <a:latin typeface="Arial"/>
-              </a:rPr>
-              <a:t>Integrated inter-depot requisition workflow complies with MoPNG public procurement norms and GeM frameworks, freeing dormant capital.</a:t>
+              <a:rPr sz="1200" b="0">
+                <a:latin typeface="Arial"/>
+              </a:rPr>
+              <a:t>Complies fully with MoPNG public procurement rules and GeM guidelines, turning idle warehouse stock into freed working capital.</a:t>
             </a:r>
           </a:p>
         </p:txBody>
@@ -7711,30 +8204,30 @@
           <p:nvPr>
             <p:extLst>
               <p:ext uri="{D42A27DB-BD31-4B8C-83A1-F6EECF244321}">
-                <p14:modId xmlns:p14="http://schemas.microsoft.com/office/powerpoint/2010/main" val="3733529667"/>
+                <p14:modId xmlns:p14="http://schemas.microsoft.com/office/powerpoint/2010/main" val="3232846245"/>
               </p:ext>
             </p:extLst>
           </p:nvPr>
         </p:nvGraphicFramePr>
         <p:xfrm>
-          <a:off x="404640" y="3184269"/>
-          <a:ext cx="11382720" cy="2754497"/>
+          <a:off x="329773" y="2520881"/>
+          <a:ext cx="11382720" cy="2764436"/>
         </p:xfrm>
         <a:graphic>
           <a:graphicData uri="http://schemas.openxmlformats.org/drawingml/2006/table">
             <a:tbl>
               <a:tblPr firstRow="1" bandRow="1">
-                <a:tableStyleId>{5C22544A-7EE6-4342-B048-85BDC9FD1C3A}</a:tableStyleId>
+                <a:tableStyleId>{7DF18680-E054-41AD-8BC1-D1AEF772440D}</a:tableStyleId>
               </a:tblPr>
               <a:tblGrid>
-                <a:gridCol w="1841771">
+                <a:gridCol w="1812792">
                   <a:extLst>
                     <a:ext uri="{9D8B030D-6E8A-4147-A177-3AD203B41FA5}">
                       <a16:colId xmlns:a16="http://schemas.microsoft.com/office/drawing/2014/main" val="3837357606"/>
                     </a:ext>
                   </a:extLst>
                 </a:gridCol>
-                <a:gridCol w="4417799">
+                <a:gridCol w="4446778">
                   <a:extLst>
                     <a:ext uri="{9D8B030D-6E8A-4147-A177-3AD203B41FA5}">
                       <a16:colId xmlns:a16="http://schemas.microsoft.com/office/drawing/2014/main" val="1540384696"/>
@@ -7756,53 +8249,22 @@
                     <a:lstStyle/>
                     <a:p>
                       <a:r>
-                        <a:rPr sz="1200" b="1" dirty="0">
+                        <a:rPr sz="1400" b="1" dirty="0">
                           <a:solidFill>
                             <a:schemeClr val="tx1"/>
                           </a:solidFill>
-                          <a:latin typeface="Arial"/>
                         </a:rPr>
                         <a:t>Dimension</a:t>
                       </a:r>
+                      <a:endParaRPr sz="1400" b="1" dirty="0">
+                        <a:solidFill>
+                          <a:schemeClr val="tx1"/>
+                        </a:solidFill>
+                        <a:latin typeface="Arial"/>
+                      </a:endParaRPr>
                     </a:p>
                   </a:txBody>
-                  <a:tcPr marL="63500" marR="63500" marT="25400" marB="25400" anchor="ctr">
-                    <a:lnL w="12700" cap="flat" cmpd="sng" algn="ctr">
-                      <a:solidFill>
-                        <a:schemeClr val="tx1"/>
-                      </a:solidFill>
-                      <a:prstDash val="solid"/>
-                      <a:round/>
-                      <a:headEnd type="none" w="med" len="med"/>
-                      <a:tailEnd type="none" w="med" len="med"/>
-                    </a:lnL>
-                    <a:lnR w="12700" cap="flat" cmpd="sng" algn="ctr">
-                      <a:noFill/>
-                      <a:prstDash val="solid"/>
-                      <a:round/>
-                      <a:headEnd type="none" w="med" len="med"/>
-                      <a:tailEnd type="none" w="med" len="med"/>
-                    </a:lnR>
-                    <a:lnT w="12700" cap="flat" cmpd="sng" algn="ctr">
-                      <a:solidFill>
-                        <a:schemeClr val="tx1"/>
-                      </a:solidFill>
-                      <a:prstDash val="solid"/>
-                      <a:round/>
-                      <a:headEnd type="none" w="med" len="med"/>
-                      <a:tailEnd type="none" w="med" len="med"/>
-                    </a:lnT>
-                    <a:lnB w="12700" cap="flat" cmpd="sng" algn="ctr">
-                      <a:noFill/>
-                      <a:prstDash val="solid"/>
-                      <a:round/>
-                      <a:headEnd type="none" w="med" len="med"/>
-                      <a:tailEnd type="none" w="med" len="med"/>
-                    </a:lnB>
-                    <a:solidFill>
-                      <a:srgbClr val="F1F5F9"/>
-                    </a:solidFill>
-                  </a:tcPr>
+                  <a:tcPr marL="63500" marR="63500" marT="25400" marB="25400" anchor="ctr"/>
                 </a:tc>
                 <a:tc>
                   <a:txBody>
@@ -7810,51 +8272,22 @@
                     <a:lstStyle/>
                     <a:p>
                       <a:r>
-                        <a:rPr sz="1200" b="1" dirty="0">
+                        <a:rPr sz="1400" b="1" dirty="0">
                           <a:solidFill>
                             <a:schemeClr val="tx1"/>
                           </a:solidFill>
-                          <a:latin typeface="Arial"/>
                         </a:rPr>
                         <a:t>Identified Challenge &amp; Risk</a:t>
                       </a:r>
+                      <a:endParaRPr sz="1400" b="1" dirty="0">
+                        <a:solidFill>
+                          <a:schemeClr val="tx1"/>
+                        </a:solidFill>
+                        <a:latin typeface="Arial"/>
+                      </a:endParaRPr>
                     </a:p>
                   </a:txBody>
-                  <a:tcPr marL="63500" marR="63500" marT="25400" marB="25400" anchor="ctr">
-                    <a:lnL w="12700" cap="flat" cmpd="sng" algn="ctr">
-                      <a:noFill/>
-                      <a:prstDash val="solid"/>
-                      <a:round/>
-                      <a:headEnd type="none" w="med" len="med"/>
-                      <a:tailEnd type="none" w="med" len="med"/>
-                    </a:lnL>
-                    <a:lnR w="12700" cap="flat" cmpd="sng" algn="ctr">
-                      <a:noFill/>
-                      <a:prstDash val="solid"/>
-                      <a:round/>
-                      <a:headEnd type="none" w="med" len="med"/>
-                      <a:tailEnd type="none" w="med" len="med"/>
-                    </a:lnR>
-                    <a:lnT w="12700" cap="flat" cmpd="sng" algn="ctr">
-                      <a:solidFill>
-                        <a:schemeClr val="tx1"/>
-                      </a:solidFill>
-                      <a:prstDash val="solid"/>
-                      <a:round/>
-                      <a:headEnd type="none" w="med" len="med"/>
-                      <a:tailEnd type="none" w="med" len="med"/>
-                    </a:lnT>
-                    <a:lnB w="12700" cap="flat" cmpd="sng" algn="ctr">
-                      <a:noFill/>
-                      <a:prstDash val="solid"/>
-                      <a:round/>
-                      <a:headEnd type="none" w="med" len="med"/>
-                      <a:tailEnd type="none" w="med" len="med"/>
-                    </a:lnB>
-                    <a:solidFill>
-                      <a:srgbClr val="F1F5F9"/>
-                    </a:solidFill>
-                  </a:tcPr>
+                  <a:tcPr marL="63500" marR="63500" marT="25400" marB="25400" anchor="ctr"/>
                 </a:tc>
                 <a:tc>
                   <a:txBody>
@@ -7862,53 +8295,22 @@
                     <a:lstStyle/>
                     <a:p>
                       <a:r>
-                        <a:rPr sz="1200" b="1" dirty="0">
+                        <a:rPr sz="1400" b="1" dirty="0">
                           <a:solidFill>
                             <a:schemeClr val="tx1"/>
                           </a:solidFill>
-                          <a:latin typeface="Arial"/>
                         </a:rPr>
                         <a:t>Strategic Mitigation Strategy</a:t>
                       </a:r>
+                      <a:endParaRPr sz="1400" b="1" dirty="0">
+                        <a:solidFill>
+                          <a:schemeClr val="tx1"/>
+                        </a:solidFill>
+                        <a:latin typeface="Arial"/>
+                      </a:endParaRPr>
                     </a:p>
                   </a:txBody>
-                  <a:tcPr marL="63500" marR="63500" marT="25400" marB="25400" anchor="ctr">
-                    <a:lnL w="12700" cap="flat" cmpd="sng" algn="ctr">
-                      <a:noFill/>
-                      <a:prstDash val="solid"/>
-                      <a:round/>
-                      <a:headEnd type="none" w="med" len="med"/>
-                      <a:tailEnd type="none" w="med" len="med"/>
-                    </a:lnL>
-                    <a:lnR w="12700" cap="flat" cmpd="sng" algn="ctr">
-                      <a:solidFill>
-                        <a:schemeClr val="tx1"/>
-                      </a:solidFill>
-                      <a:prstDash val="solid"/>
-                      <a:round/>
-                      <a:headEnd type="none" w="med" len="med"/>
-                      <a:tailEnd type="none" w="med" len="med"/>
-                    </a:lnR>
-                    <a:lnT w="12700" cap="flat" cmpd="sng" algn="ctr">
-                      <a:solidFill>
-                        <a:schemeClr val="tx1"/>
-                      </a:solidFill>
-                      <a:prstDash val="solid"/>
-                      <a:round/>
-                      <a:headEnd type="none" w="med" len="med"/>
-                      <a:tailEnd type="none" w="med" len="med"/>
-                    </a:lnT>
-                    <a:lnB w="12700" cap="flat" cmpd="sng" algn="ctr">
-                      <a:noFill/>
-                      <a:prstDash val="solid"/>
-                      <a:round/>
-                      <a:headEnd type="none" w="med" len="med"/>
-                      <a:tailEnd type="none" w="med" len="med"/>
-                    </a:lnB>
-                    <a:solidFill>
-                      <a:srgbClr val="F1F5F9"/>
-                    </a:solidFill>
-                  </a:tcPr>
+                  <a:tcPr marL="63500" marR="63500" marT="25400" marB="25400" anchor="ctr"/>
                 </a:tc>
                 <a:extLst>
                   <a:ext uri="{0D108BD9-81ED-4DB2-BD59-A6C34878D82A}">
@@ -7923,47 +8325,16 @@
                     <a:lstStyle/>
                     <a:p>
                       <a:r>
-                        <a:rPr sz="1000" b="1">
-                          <a:latin typeface="Arial"/>
-                        </a:rPr>
-                        <a:t>Safety &amp; Reliability
+                        <a:rPr sz="1200" b="1" dirty="0"/>
+                        <a:t>Safety in High-Pressure Plants
 (Critical Process Spares)</a:t>
                       </a:r>
+                      <a:endParaRPr sz="1200" b="1" dirty="0">
+                        <a:latin typeface="Arial"/>
+                      </a:endParaRPr>
                     </a:p>
                   </a:txBody>
-                  <a:tcPr marL="63500" marR="63500" marT="25400" marB="25400" anchor="ctr">
-                    <a:lnL w="12700" cap="flat" cmpd="sng" algn="ctr">
-                      <a:solidFill>
-                        <a:schemeClr val="tx1"/>
-                      </a:solidFill>
-                      <a:prstDash val="solid"/>
-                      <a:round/>
-                      <a:headEnd type="none" w="med" len="med"/>
-                      <a:tailEnd type="none" w="med" len="med"/>
-                    </a:lnL>
-                    <a:lnR w="12700" cap="flat" cmpd="sng" algn="ctr">
-                      <a:noFill/>
-                      <a:prstDash val="solid"/>
-                      <a:round/>
-                      <a:headEnd type="none" w="med" len="med"/>
-                      <a:tailEnd type="none" w="med" len="med"/>
-                    </a:lnR>
-                    <a:lnT w="12700" cap="flat" cmpd="sng" algn="ctr">
-                      <a:noFill/>
-                      <a:prstDash val="solid"/>
-                      <a:round/>
-                      <a:headEnd type="none" w="med" len="med"/>
-                      <a:tailEnd type="none" w="med" len="med"/>
-                    </a:lnT>
-                    <a:lnB w="12700" cap="flat" cmpd="sng" algn="ctr">
-                      <a:noFill/>
-                      <a:prstDash val="solid"/>
-                      <a:round/>
-                      <a:headEnd type="none" w="med" len="med"/>
-                      <a:tailEnd type="none" w="med" len="med"/>
-                    </a:lnB>
-                    <a:noFill/>
-                  </a:tcPr>
+                  <a:tcPr marL="63500" marR="63500" marT="25400" marB="25400" anchor="ctr"/>
                 </a:tc>
                 <a:tc>
                   <a:txBody>
@@ -7971,44 +8342,15 @@
                     <a:lstStyle/>
                     <a:p>
                       <a:r>
-                        <a:rPr sz="1000" b="0">
-                          <a:latin typeface="Arial"/>
-                        </a:rPr>
-                        <a:t>False-positive semantic matches in safety-critical parts (e.g., carbon steel flange substituted into a high-temp sour corrosive line).</a:t>
+                        <a:rPr sz="1200" b="0" dirty="0"/>
+                        <a:t>AI might confuse two similar-looking parts (e.g., wrong pressure rating), risking pipe leaks or plant accidents.</a:t>
                       </a:r>
+                      <a:endParaRPr sz="1200" b="0" dirty="0">
+                        <a:latin typeface="Arial"/>
+                      </a:endParaRPr>
                     </a:p>
                   </a:txBody>
-                  <a:tcPr marL="63500" marR="63500" marT="25400" marB="25400" anchor="ctr">
-                    <a:lnL w="12700" cap="flat" cmpd="sng" algn="ctr">
-                      <a:noFill/>
-                      <a:prstDash val="solid"/>
-                      <a:round/>
-                      <a:headEnd type="none" w="med" len="med"/>
-                      <a:tailEnd type="none" w="med" len="med"/>
-                    </a:lnL>
-                    <a:lnR w="12700" cap="flat" cmpd="sng" algn="ctr">
-                      <a:noFill/>
-                      <a:prstDash val="solid"/>
-                      <a:round/>
-                      <a:headEnd type="none" w="med" len="med"/>
-                      <a:tailEnd type="none" w="med" len="med"/>
-                    </a:lnR>
-                    <a:lnT w="12700" cap="flat" cmpd="sng" algn="ctr">
-                      <a:noFill/>
-                      <a:prstDash val="solid"/>
-                      <a:round/>
-                      <a:headEnd type="none" w="med" len="med"/>
-                      <a:tailEnd type="none" w="med" len="med"/>
-                    </a:lnT>
-                    <a:lnB w="12700" cap="flat" cmpd="sng" algn="ctr">
-                      <a:noFill/>
-                      <a:prstDash val="solid"/>
-                      <a:round/>
-                      <a:headEnd type="none" w="med" len="med"/>
-                      <a:tailEnd type="none" w="med" len="med"/>
-                    </a:lnB>
-                    <a:noFill/>
-                  </a:tcPr>
+                  <a:tcPr marL="63500" marR="63500" marT="25400" marB="25400" anchor="ctr"/>
                 </a:tc>
                 <a:tc>
                   <a:txBody>
@@ -8016,46 +8358,15 @@
                     <a:lstStyle/>
                     <a:p>
                       <a:r>
-                        <a:rPr sz="1000" b="0">
-                          <a:latin typeface="Arial"/>
-                        </a:rPr>
-                        <a:t>Deterministic ASME/ASTM Constraint Layer: Pure-Python vectorized rules strictly enforce zero-tolerance on size, pressure class, and metallurgy upgrade limits, overriding vector similarity.</a:t>
+                        <a:rPr sz="1200" b="0"/>
+                        <a:t>Deterministic Engineering Rules: Strict rules enforce zero tolerance on size, pressure, and metal grades—blocking unsafe AI suggestions every time.</a:t>
                       </a:r>
+                      <a:endParaRPr sz="1200" b="0">
+                        <a:latin typeface="Arial"/>
+                      </a:endParaRPr>
                     </a:p>
                   </a:txBody>
-                  <a:tcPr marL="63500" marR="63500" marT="25400" marB="25400" anchor="ctr">
-                    <a:lnL w="12700" cap="flat" cmpd="sng" algn="ctr">
-                      <a:noFill/>
-                      <a:prstDash val="solid"/>
-                      <a:round/>
-                      <a:headEnd type="none" w="med" len="med"/>
-                      <a:tailEnd type="none" w="med" len="med"/>
-                    </a:lnL>
-                    <a:lnR w="12700" cap="flat" cmpd="sng" algn="ctr">
-                      <a:solidFill>
-                        <a:schemeClr val="tx1"/>
-                      </a:solidFill>
-                      <a:prstDash val="solid"/>
-                      <a:round/>
-                      <a:headEnd type="none" w="med" len="med"/>
-                      <a:tailEnd type="none" w="med" len="med"/>
-                    </a:lnR>
-                    <a:lnT w="12700" cap="flat" cmpd="sng" algn="ctr">
-                      <a:noFill/>
-                      <a:prstDash val="solid"/>
-                      <a:round/>
-                      <a:headEnd type="none" w="med" len="med"/>
-                      <a:tailEnd type="none" w="med" len="med"/>
-                    </a:lnT>
-                    <a:lnB w="12700" cap="flat" cmpd="sng" algn="ctr">
-                      <a:noFill/>
-                      <a:prstDash val="solid"/>
-                      <a:round/>
-                      <a:headEnd type="none" w="med" len="med"/>
-                      <a:tailEnd type="none" w="med" len="med"/>
-                    </a:lnB>
-                    <a:noFill/>
-                  </a:tcPr>
+                  <a:tcPr marL="63500" marR="63500" marT="25400" marB="25400" anchor="ctr"/>
                 </a:tc>
                 <a:extLst>
                   <a:ext uri="{0D108BD9-81ED-4DB2-BD59-A6C34878D82A}">
@@ -8070,47 +8381,16 @@
                     <a:lstStyle/>
                     <a:p>
                       <a:r>
-                        <a:rPr sz="1000" b="1">
-                          <a:latin typeface="Arial"/>
-                        </a:rPr>
-                        <a:t>Operational Friction
-(Site User Adoption)</a:t>
+                        <a:rPr sz="1200" b="1"/>
+                        <a:t>User Adoption
+(Plant &amp; Site Engineers)</a:t>
                       </a:r>
+                      <a:endParaRPr sz="1200" b="1">
+                        <a:latin typeface="Arial"/>
+                      </a:endParaRPr>
                     </a:p>
                   </a:txBody>
-                  <a:tcPr marL="63500" marR="63500" marT="25400" marB="25400" anchor="ctr">
-                    <a:lnL w="12700" cap="flat" cmpd="sng" algn="ctr">
-                      <a:solidFill>
-                        <a:schemeClr val="tx1"/>
-                      </a:solidFill>
-                      <a:prstDash val="solid"/>
-                      <a:round/>
-                      <a:headEnd type="none" w="med" len="med"/>
-                      <a:tailEnd type="none" w="med" len="med"/>
-                    </a:lnL>
-                    <a:lnR w="12700" cap="flat" cmpd="sng" algn="ctr">
-                      <a:noFill/>
-                      <a:prstDash val="solid"/>
-                      <a:round/>
-                      <a:headEnd type="none" w="med" len="med"/>
-                      <a:tailEnd type="none" w="med" len="med"/>
-                    </a:lnR>
-                    <a:lnT w="12700" cap="flat" cmpd="sng" algn="ctr">
-                      <a:noFill/>
-                      <a:prstDash val="solid"/>
-                      <a:round/>
-                      <a:headEnd type="none" w="med" len="med"/>
-                      <a:tailEnd type="none" w="med" len="med"/>
-                    </a:lnT>
-                    <a:lnB w="12700" cap="flat" cmpd="sng" algn="ctr">
-                      <a:noFill/>
-                      <a:prstDash val="solid"/>
-                      <a:round/>
-                      <a:headEnd type="none" w="med" len="med"/>
-                      <a:tailEnd type="none" w="med" len="med"/>
-                    </a:lnB>
-                    <a:noFill/>
-                  </a:tcPr>
+                  <a:tcPr marL="63500" marR="63500" marT="25400" marB="25400" anchor="ctr"/>
                 </a:tc>
                 <a:tc>
                   <a:txBody>
@@ -8118,44 +8398,15 @@
                     <a:lstStyle/>
                     <a:p>
                       <a:r>
-                        <a:rPr sz="1000" b="0" dirty="0">
-                          <a:latin typeface="Arial"/>
-                        </a:rPr>
-                        <a:t>Procurement and site engineers bypass complex, multi-field manual forms in high-pressure plant maintenance scenarios.</a:t>
+                        <a:rPr sz="1200" b="0" dirty="0"/>
+                        <a:t>Busy site engineers avoid using complicated tools with long manual forms during urgent plant maintenance.</a:t>
                       </a:r>
+                      <a:endParaRPr sz="1200" b="0" dirty="0">
+                        <a:latin typeface="Arial"/>
+                      </a:endParaRPr>
                     </a:p>
                   </a:txBody>
-                  <a:tcPr marL="63500" marR="63500" marT="25400" marB="25400" anchor="ctr">
-                    <a:lnL w="12700" cap="flat" cmpd="sng" algn="ctr">
-                      <a:noFill/>
-                      <a:prstDash val="solid"/>
-                      <a:round/>
-                      <a:headEnd type="none" w="med" len="med"/>
-                      <a:tailEnd type="none" w="med" len="med"/>
-                    </a:lnL>
-                    <a:lnR w="12700" cap="flat" cmpd="sng" algn="ctr">
-                      <a:noFill/>
-                      <a:prstDash val="solid"/>
-                      <a:round/>
-                      <a:headEnd type="none" w="med" len="med"/>
-                      <a:tailEnd type="none" w="med" len="med"/>
-                    </a:lnR>
-                    <a:lnT w="12700" cap="flat" cmpd="sng" algn="ctr">
-                      <a:noFill/>
-                      <a:prstDash val="solid"/>
-                      <a:round/>
-                      <a:headEnd type="none" w="med" len="med"/>
-                      <a:tailEnd type="none" w="med" len="med"/>
-                    </a:lnT>
-                    <a:lnB w="12700" cap="flat" cmpd="sng" algn="ctr">
-                      <a:noFill/>
-                      <a:prstDash val="solid"/>
-                      <a:round/>
-                      <a:headEnd type="none" w="med" len="med"/>
-                      <a:tailEnd type="none" w="med" len="med"/>
-                    </a:lnB>
-                    <a:noFill/>
-                  </a:tcPr>
+                  <a:tcPr marL="63500" marR="63500" marT="25400" marB="25400" anchor="ctr"/>
                 </a:tc>
                 <a:tc>
                   <a:txBody>
@@ -8163,46 +8414,15 @@
                     <a:lstStyle/>
                     <a:p>
                       <a:r>
-                        <a:rPr sz="1000" b="0">
-                          <a:latin typeface="Arial"/>
-                        </a:rPr>
-                        <a:t>Zero-Typing Intake &amp; HITL Validation: Automated OCR parsing of MTCs/challans auto-fills technical slots in &lt;30s; engineers only confirm color-coded visual confidence badges.</a:t>
+                        <a:rPr sz="1200" b="0"/>
+                        <a:t>Zero-Typing Smart Upload: Auto-extracts specs from certificates in under 30 seconds; engineers only review simple green/amber verification badges.</a:t>
                       </a:r>
+                      <a:endParaRPr sz="1200" b="0">
+                        <a:latin typeface="Arial"/>
+                      </a:endParaRPr>
                     </a:p>
                   </a:txBody>
-                  <a:tcPr marL="63500" marR="63500" marT="25400" marB="25400" anchor="ctr">
-                    <a:lnL w="12700" cap="flat" cmpd="sng" algn="ctr">
-                      <a:noFill/>
-                      <a:prstDash val="solid"/>
-                      <a:round/>
-                      <a:headEnd type="none" w="med" len="med"/>
-                      <a:tailEnd type="none" w="med" len="med"/>
-                    </a:lnL>
-                    <a:lnR w="12700" cap="flat" cmpd="sng" algn="ctr">
-                      <a:solidFill>
-                        <a:schemeClr val="tx1"/>
-                      </a:solidFill>
-                      <a:prstDash val="solid"/>
-                      <a:round/>
-                      <a:headEnd type="none" w="med" len="med"/>
-                      <a:tailEnd type="none" w="med" len="med"/>
-                    </a:lnR>
-                    <a:lnT w="12700" cap="flat" cmpd="sng" algn="ctr">
-                      <a:noFill/>
-                      <a:prstDash val="solid"/>
-                      <a:round/>
-                      <a:headEnd type="none" w="med" len="med"/>
-                      <a:tailEnd type="none" w="med" len="med"/>
-                    </a:lnT>
-                    <a:lnB w="12700" cap="flat" cmpd="sng" algn="ctr">
-                      <a:noFill/>
-                      <a:prstDash val="solid"/>
-                      <a:round/>
-                      <a:headEnd type="none" w="med" len="med"/>
-                      <a:tailEnd type="none" w="med" len="med"/>
-                    </a:lnB>
-                    <a:noFill/>
-                  </a:tcPr>
+                  <a:tcPr marL="63500" marR="63500" marT="25400" marB="25400" anchor="ctr"/>
                 </a:tc>
                 <a:extLst>
                   <a:ext uri="{0D108BD9-81ED-4DB2-BD59-A6C34878D82A}">
@@ -8217,47 +8437,16 @@
                     <a:lstStyle/>
                     <a:p>
                       <a:r>
-                        <a:rPr sz="1000" b="1">
-                          <a:latin typeface="Arial"/>
-                        </a:rPr>
+                        <a:rPr sz="1200" b="1"/>
                         <a:t>Data Confidentiality
 (Inter-CPSE Commercials)</a:t>
                       </a:r>
+                      <a:endParaRPr sz="1200" b="1">
+                        <a:latin typeface="Arial"/>
+                      </a:endParaRPr>
                     </a:p>
                   </a:txBody>
-                  <a:tcPr marL="63500" marR="63500" marT="25400" marB="25400" anchor="ctr">
-                    <a:lnL w="12700" cap="flat" cmpd="sng" algn="ctr">
-                      <a:solidFill>
-                        <a:schemeClr val="tx1"/>
-                      </a:solidFill>
-                      <a:prstDash val="solid"/>
-                      <a:round/>
-                      <a:headEnd type="none" w="med" len="med"/>
-                      <a:tailEnd type="none" w="med" len="med"/>
-                    </a:lnL>
-                    <a:lnR w="12700" cap="flat" cmpd="sng" algn="ctr">
-                      <a:noFill/>
-                      <a:prstDash val="solid"/>
-                      <a:round/>
-                      <a:headEnd type="none" w="med" len="med"/>
-                      <a:tailEnd type="none" w="med" len="med"/>
-                    </a:lnR>
-                    <a:lnT w="12700" cap="flat" cmpd="sng" algn="ctr">
-                      <a:noFill/>
-                      <a:prstDash val="solid"/>
-                      <a:round/>
-                      <a:headEnd type="none" w="med" len="med"/>
-                      <a:tailEnd type="none" w="med" len="med"/>
-                    </a:lnT>
-                    <a:lnB w="12700" cap="flat" cmpd="sng" algn="ctr">
-                      <a:noFill/>
-                      <a:prstDash val="solid"/>
-                      <a:round/>
-                      <a:headEnd type="none" w="med" len="med"/>
-                      <a:tailEnd type="none" w="med" len="med"/>
-                    </a:lnB>
-                    <a:noFill/>
-                  </a:tcPr>
+                  <a:tcPr marL="63500" marR="63500" marT="25400" marB="25400" anchor="ctr"/>
                 </a:tc>
                 <a:tc>
                   <a:txBody>
@@ -8265,44 +8454,15 @@
                     <a:lstStyle/>
                     <a:p>
                       <a:r>
-                        <a:rPr sz="1000" b="0">
-                          <a:latin typeface="Arial"/>
-                        </a:rPr>
-                        <a:t>CPSEs are reluctant to expose proprietary vendor pricing, discounts, and commercial terms to peer public sector enterprises.</a:t>
+                        <a:rPr sz="1200" b="0" dirty="0"/>
+                        <a:t>Enterprises are reluctant to share sensitive supplier pricing, commercial discounts, or private vendor contracts.</a:t>
                       </a:r>
+                      <a:endParaRPr sz="1200" b="0" dirty="0">
+                        <a:latin typeface="Arial"/>
+                      </a:endParaRPr>
                     </a:p>
                   </a:txBody>
-                  <a:tcPr marL="63500" marR="63500" marT="25400" marB="25400" anchor="ctr">
-                    <a:lnL w="12700" cap="flat" cmpd="sng" algn="ctr">
-                      <a:noFill/>
-                      <a:prstDash val="solid"/>
-                      <a:round/>
-                      <a:headEnd type="none" w="med" len="med"/>
-                      <a:tailEnd type="none" w="med" len="med"/>
-                    </a:lnL>
-                    <a:lnR w="12700" cap="flat" cmpd="sng" algn="ctr">
-                      <a:noFill/>
-                      <a:prstDash val="solid"/>
-                      <a:round/>
-                      <a:headEnd type="none" w="med" len="med"/>
-                      <a:tailEnd type="none" w="med" len="med"/>
-                    </a:lnR>
-                    <a:lnT w="12700" cap="flat" cmpd="sng" algn="ctr">
-                      <a:noFill/>
-                      <a:prstDash val="solid"/>
-                      <a:round/>
-                      <a:headEnd type="none" w="med" len="med"/>
-                      <a:tailEnd type="none" w="med" len="med"/>
-                    </a:lnT>
-                    <a:lnB w="12700" cap="flat" cmpd="sng" algn="ctr">
-                      <a:noFill/>
-                      <a:prstDash val="solid"/>
-                      <a:round/>
-                      <a:headEnd type="none" w="med" len="med"/>
-                      <a:tailEnd type="none" w="med" len="med"/>
-                    </a:lnB>
-                    <a:noFill/>
-                  </a:tcPr>
+                  <a:tcPr marL="63500" marR="63500" marT="25400" marB="25400" anchor="ctr"/>
                 </a:tc>
                 <a:tc>
                   <a:txBody>
@@ -8310,46 +8470,15 @@
                     <a:lstStyle/>
                     <a:p>
                       <a:r>
-                        <a:rPr sz="1000" b="0">
-                          <a:latin typeface="Arial"/>
-                        </a:rPr>
-                        <a:t>Attribute-Level Federated Discovery: Cross-CPSE search reveals only physical engineering specifications and depot inventory counts; commercial pricing remains cryptographically masked.</a:t>
+                        <a:rPr sz="1200" b="0"/>
+                        <a:t>Attribute-Level Privacy: Cross-company search reveals only physical specs and depot inventory counts; commercial prices remain strictly hidden.</a:t>
                       </a:r>
+                      <a:endParaRPr sz="1200" b="0">
+                        <a:latin typeface="Arial"/>
+                      </a:endParaRPr>
                     </a:p>
                   </a:txBody>
-                  <a:tcPr marL="63500" marR="63500" marT="25400" marB="25400" anchor="ctr">
-                    <a:lnL w="12700" cap="flat" cmpd="sng" algn="ctr">
-                      <a:noFill/>
-                      <a:prstDash val="solid"/>
-                      <a:round/>
-                      <a:headEnd type="none" w="med" len="med"/>
-                      <a:tailEnd type="none" w="med" len="med"/>
-                    </a:lnL>
-                    <a:lnR w="12700" cap="flat" cmpd="sng" algn="ctr">
-                      <a:solidFill>
-                        <a:schemeClr val="tx1"/>
-                      </a:solidFill>
-                      <a:prstDash val="solid"/>
-                      <a:round/>
-                      <a:headEnd type="none" w="med" len="med"/>
-                      <a:tailEnd type="none" w="med" len="med"/>
-                    </a:lnR>
-                    <a:lnT w="12700" cap="flat" cmpd="sng" algn="ctr">
-                      <a:noFill/>
-                      <a:prstDash val="solid"/>
-                      <a:round/>
-                      <a:headEnd type="none" w="med" len="med"/>
-                      <a:tailEnd type="none" w="med" len="med"/>
-                    </a:lnT>
-                    <a:lnB w="12700" cap="flat" cmpd="sng" algn="ctr">
-                      <a:noFill/>
-                      <a:prstDash val="solid"/>
-                      <a:round/>
-                      <a:headEnd type="none" w="med" len="med"/>
-                      <a:tailEnd type="none" w="med" len="med"/>
-                    </a:lnB>
-                    <a:noFill/>
-                  </a:tcPr>
+                  <a:tcPr marL="63500" marR="63500" marT="25400" marB="25400" anchor="ctr"/>
                 </a:tc>
                 <a:extLst>
                   <a:ext uri="{0D108BD9-81ED-4DB2-BD59-A6C34878D82A}">
@@ -8364,49 +8493,16 @@
                     <a:lstStyle/>
                     <a:p>
                       <a:r>
-                        <a:rPr sz="1000" b="1">
-                          <a:latin typeface="Arial"/>
-                        </a:rPr>
+                        <a:rPr sz="1200" b="1"/>
                         <a:t>ERP Stability
-(IT Infrastructure Risk)</a:t>
+(IT Infrastructure Safety)</a:t>
                       </a:r>
+                      <a:endParaRPr sz="1200" b="1">
+                        <a:latin typeface="Arial"/>
+                      </a:endParaRPr>
                     </a:p>
                   </a:txBody>
-                  <a:tcPr marL="63500" marR="63500" marT="25400" marB="25400" anchor="ctr">
-                    <a:lnL w="12700" cap="flat" cmpd="sng" algn="ctr">
-                      <a:solidFill>
-                        <a:schemeClr val="tx1"/>
-                      </a:solidFill>
-                      <a:prstDash val="solid"/>
-                      <a:round/>
-                      <a:headEnd type="none" w="med" len="med"/>
-                      <a:tailEnd type="none" w="med" len="med"/>
-                    </a:lnL>
-                    <a:lnR w="12700" cap="flat" cmpd="sng" algn="ctr">
-                      <a:noFill/>
-                      <a:prstDash val="solid"/>
-                      <a:round/>
-                      <a:headEnd type="none" w="med" len="med"/>
-                      <a:tailEnd type="none" w="med" len="med"/>
-                    </a:lnR>
-                    <a:lnT w="12700" cap="flat" cmpd="sng" algn="ctr">
-                      <a:noFill/>
-                      <a:prstDash val="solid"/>
-                      <a:round/>
-                      <a:headEnd type="none" w="med" len="med"/>
-                      <a:tailEnd type="none" w="med" len="med"/>
-                    </a:lnT>
-                    <a:lnB w="12700" cap="flat" cmpd="sng" algn="ctr">
-                      <a:solidFill>
-                        <a:schemeClr val="tx1"/>
-                      </a:solidFill>
-                      <a:prstDash val="solid"/>
-                      <a:round/>
-                      <a:headEnd type="none" w="med" len="med"/>
-                      <a:tailEnd type="none" w="med" len="med"/>
-                    </a:lnB>
-                    <a:noFill/>
-                  </a:tcPr>
+                  <a:tcPr marL="63500" marR="63500" marT="25400" marB="25400" anchor="ctr"/>
                 </a:tc>
                 <a:tc>
                   <a:txBody>
@@ -8414,46 +8510,15 @@
                     <a:lstStyle/>
                     <a:p>
                       <a:r>
-                        <a:rPr sz="1000" b="0">
-                          <a:latin typeface="Arial"/>
-                        </a:rPr>
-                        <a:t>Enterprise resistance to modifying live transactional tables or risking downtime in production SAP MM/Oracle databases.</a:t>
+                        <a:rPr sz="1200" b="0" dirty="0"/>
+                        <a:t>IT teams worry about modifying live transactional tables or risking downtime in production SAP MM/Oracle databases.</a:t>
                       </a:r>
+                      <a:endParaRPr sz="1200" b="0" dirty="0">
+                        <a:latin typeface="Arial"/>
+                      </a:endParaRPr>
                     </a:p>
                   </a:txBody>
-                  <a:tcPr marL="63500" marR="63500" marT="25400" marB="25400" anchor="ctr">
-                    <a:lnL w="12700" cap="flat" cmpd="sng" algn="ctr">
-                      <a:noFill/>
-                      <a:prstDash val="solid"/>
-                      <a:round/>
-                      <a:headEnd type="none" w="med" len="med"/>
-                      <a:tailEnd type="none" w="med" len="med"/>
-                    </a:lnL>
-                    <a:lnR w="12700" cap="flat" cmpd="sng" algn="ctr">
-                      <a:noFill/>
-                      <a:prstDash val="solid"/>
-                      <a:round/>
-                      <a:headEnd type="none" w="med" len="med"/>
-                      <a:tailEnd type="none" w="med" len="med"/>
-                    </a:lnR>
-                    <a:lnT w="12700" cap="flat" cmpd="sng" algn="ctr">
-                      <a:noFill/>
-                      <a:prstDash val="solid"/>
-                      <a:round/>
-                      <a:headEnd type="none" w="med" len="med"/>
-                      <a:tailEnd type="none" w="med" len="med"/>
-                    </a:lnT>
-                    <a:lnB w="12700" cap="flat" cmpd="sng" algn="ctr">
-                      <a:solidFill>
-                        <a:schemeClr val="tx1"/>
-                      </a:solidFill>
-                      <a:prstDash val="solid"/>
-                      <a:round/>
-                      <a:headEnd type="none" w="med" len="med"/>
-                      <a:tailEnd type="none" w="med" len="med"/>
-                    </a:lnB>
-                    <a:noFill/>
-                  </a:tcPr>
+                  <a:tcPr marL="63500" marR="63500" marT="25400" marB="25400" anchor="ctr"/>
                 </a:tc>
                 <a:tc>
                   <a:txBody>
@@ -8461,48 +8526,15 @@
                     <a:lstStyle/>
                     <a:p>
                       <a:r>
-                        <a:rPr sz="1000" b="0" dirty="0">
-                          <a:latin typeface="Arial"/>
-                        </a:rPr>
-                        <a:t>Non-Invasive Read-Only Interlingua: Operates as an external metadata discovery overlay; underlying legacy ERP database schemas remain 100% untouched.</a:t>
+                        <a:rPr sz="1200" b="0" dirty="0"/>
+                        <a:t>Zero-Risk Read-Only Layer: Connects purely as a safe reading layer—existing ERP databases and daily operations remain 100% untouched.</a:t>
                       </a:r>
+                      <a:endParaRPr sz="1200" b="0" dirty="0">
+                        <a:latin typeface="Arial"/>
+                      </a:endParaRPr>
                     </a:p>
                   </a:txBody>
-                  <a:tcPr marL="63500" marR="63500" marT="25400" marB="25400" anchor="ctr">
-                    <a:lnL w="12700" cap="flat" cmpd="sng" algn="ctr">
-                      <a:noFill/>
-                      <a:prstDash val="solid"/>
-                      <a:round/>
-                      <a:headEnd type="none" w="med" len="med"/>
-                      <a:tailEnd type="none" w="med" len="med"/>
-                    </a:lnL>
-                    <a:lnR w="12700" cap="flat" cmpd="sng" algn="ctr">
-                      <a:solidFill>
-                        <a:schemeClr val="tx1"/>
-                      </a:solidFill>
-                      <a:prstDash val="solid"/>
-                      <a:round/>
-                      <a:headEnd type="none" w="med" len="med"/>
-                      <a:tailEnd type="none" w="med" len="med"/>
-                    </a:lnR>
-                    <a:lnT w="12700" cap="flat" cmpd="sng" algn="ctr">
-                      <a:noFill/>
-                      <a:prstDash val="solid"/>
-                      <a:round/>
-                      <a:headEnd type="none" w="med" len="med"/>
-                      <a:tailEnd type="none" w="med" len="med"/>
-                    </a:lnT>
-                    <a:lnB w="12700" cap="flat" cmpd="sng" algn="ctr">
-                      <a:solidFill>
-                        <a:schemeClr val="tx1"/>
-                      </a:solidFill>
-                      <a:prstDash val="solid"/>
-                      <a:round/>
-                      <a:headEnd type="none" w="med" len="med"/>
-                      <a:tailEnd type="none" w="med" len="med"/>
-                    </a:lnB>
-                    <a:noFill/>
-                  </a:tcPr>
+                  <a:tcPr marL="63500" marR="63500" marT="25400" marB="25400" anchor="ctr"/>
                 </a:tc>
                 <a:extLst>
                   <a:ext uri="{0D108BD9-81ED-4DB2-BD59-A6C34878D82A}">
@@ -8861,7 +8893,7 @@
               </a:spcAft>
             </a:pPr>
             <a:r>
-              <a:rPr sz="1200">
+              <a:rPr sz="1200" b="0">
                 <a:latin typeface="Arial"/>
               </a:rPr>
               <a:t>• </a:t>
@@ -8870,13 +8902,13 @@
               <a:rPr sz="1200" b="1">
                 <a:latin typeface="Arial"/>
               </a:rPr>
-              <a:t>Primary Beneficiaries: </a:t>
-            </a:r>
-            <a:r>
-              <a:rPr sz="1200">
-                <a:latin typeface="Arial"/>
-              </a:rPr>
-              <a:t>MoPNG, CPSEs (IOCL, ONGC, BPCL, GAIL, HPCL), refinery maintenance engineers, and depot procurement managers.</a:t>
+              <a:t>Who It Helps: </a:t>
+            </a:r>
+            <a:r>
+              <a:rPr sz="1200" b="0">
+                <a:latin typeface="Arial"/>
+              </a:rPr>
+              <a:t>Ministry of Petroleum (MoPNG), Oil PSUs (IOCL, ONGC, BPCL, HPCL, GAIL), refinery engineers, and depot purchase managers.</a:t>
             </a:r>
           </a:p>
           <a:p>
@@ -8886,7 +8918,7 @@
               </a:spcAft>
             </a:pPr>
             <a:r>
-              <a:rPr sz="1200">
+              <a:rPr sz="1200" b="0">
                 <a:latin typeface="Arial"/>
               </a:rPr>
               <a:t>• </a:t>
@@ -8895,13 +8927,13 @@
               <a:rPr sz="1200" b="1">
                 <a:latin typeface="Arial"/>
               </a:rPr>
-              <a:t>Fast Emergency Turnaround: </a:t>
-            </a:r>
-            <a:r>
-              <a:rPr sz="1200">
-                <a:latin typeface="Arial"/>
-              </a:rPr>
-              <a:t>Reduces critical spare discovery and transfer from 4–6 weeks of public tendering to under 48 hours via sister depots.</a:t>
+              <a:t>Emergency Spares in Under 48 Hours: </a:t>
+            </a:r>
+            <a:r>
+              <a:rPr sz="1200" b="0">
+                <a:latin typeface="Arial"/>
+              </a:rPr>
+              <a:t>Cuts spare part procurement time from 4–6 weeks of public tendering down to under 48 hours via sister company depots.</a:t>
             </a:r>
           </a:p>
           <a:p>
@@ -8911,7 +8943,7 @@
               </a:spcAft>
             </a:pPr>
             <a:r>
-              <a:rPr sz="1200">
+              <a:rPr sz="1200" b="0">
                 <a:latin typeface="Arial"/>
               </a:rPr>
               <a:t>• </a:t>
@@ -8920,13 +8952,13 @@
               <a:rPr sz="1200" b="1">
                 <a:latin typeface="Arial"/>
               </a:rPr>
-              <a:t>Catalog De-cluttering: </a:t>
-            </a:r>
-            <a:r>
-              <a:rPr sz="1200">
-                <a:latin typeface="Arial"/>
-              </a:rPr>
-              <a:t>Eliminates up to 35% duplicate material codes across legacy SAP MM / Oracle systems, establishing clean master records.</a:t>
+              <a:t>Cleans Up to 35% Duplicate Items: </a:t>
+            </a:r>
+            <a:r>
+              <a:rPr sz="1200" b="0">
+                <a:latin typeface="Arial"/>
+              </a:rPr>
+              <a:t>Eliminates confusing duplicate item codes across legacy SAP systems, creating one clean, standardized master catalog.</a:t>
             </a:r>
           </a:p>
           <a:p>
@@ -8936,7 +8968,7 @@
               </a:spcAft>
             </a:pPr>
             <a:r>
-              <a:rPr sz="1200">
+              <a:rPr sz="1200" b="0">
                 <a:latin typeface="Arial"/>
               </a:rPr>
               <a:t>• </a:t>
@@ -8945,13 +8977,13 @@
               <a:rPr sz="1200" b="1">
                 <a:latin typeface="Arial"/>
               </a:rPr>
-              <a:t>Refinery Uptime Assurance: </a:t>
-            </a:r>
-            <a:r>
-              <a:rPr sz="1200">
-                <a:latin typeface="Arial"/>
-              </a:rPr>
-              <a:t>Rapid spare locator prevents costly unplanned plant shutdowns ($50k+/hr outage costs in hydrocarbon processing).</a:t>
+              <a:t>Prevents Costly Plant Shutdowns: </a:t>
+            </a:r>
+            <a:r>
+              <a:rPr sz="1200" b="0">
+                <a:latin typeface="Arial"/>
+              </a:rPr>
+              <a:t>Locates emergency replacement spares immediately, avoiding unplanned refinery outages that cost over ₹40 Lakhs per hour.</a:t>
             </a:r>
           </a:p>
         </p:txBody>
@@ -9003,7 +9035,7 @@
               </a:spcAft>
             </a:pPr>
             <a:r>
-              <a:rPr sz="1200">
+              <a:rPr sz="1200" b="0">
                 <a:latin typeface="Arial"/>
               </a:rPr>
               <a:t>• </a:t>
@@ -9012,13 +9044,13 @@
               <a:rPr sz="1200" b="1">
                 <a:latin typeface="Arial"/>
               </a:rPr>
-              <a:t>Working Capital Unlocked: </a:t>
-            </a:r>
-            <a:r>
-              <a:rPr sz="1200">
-                <a:latin typeface="Arial"/>
-              </a:rPr>
-              <a:t>Frees an estimated 15%–25% of dormant inventory capital (₹1,500+ Cr across MoPNG CPSEs) by mobilizing idle surplus.</a:t>
+              <a:t>Unlocks ₹1,500+ Crores: </a:t>
+            </a:r>
+            <a:r>
+              <a:rPr sz="1200" b="0">
+                <a:latin typeface="Arial"/>
+              </a:rPr>
+              <a:t>Frees 15%–25% of dormant working capital trapped in idle, duplicate inventory across MoPNG enterprises.</a:t>
             </a:r>
           </a:p>
           <a:p>
@@ -9028,7 +9060,7 @@
               </a:spcAft>
             </a:pPr>
             <a:r>
-              <a:rPr sz="1200">
+              <a:rPr sz="1200" b="0">
                 <a:latin typeface="Arial"/>
               </a:rPr>
               <a:t>• </a:t>
@@ -9037,13 +9069,13 @@
               <a:rPr sz="1200" b="1">
                 <a:latin typeface="Arial"/>
               </a:rPr>
-              <a:t>Bulk GeM Sourcing Savings: </a:t>
-            </a:r>
-            <a:r>
-              <a:rPr sz="1200">
-                <a:latin typeface="Arial"/>
-              </a:rPr>
-              <a:t>Harmonized canonical codes aggregate cross-CPSE demand, unlocking 8%–15% bulk procurement discounts on common MRO items.</a:t>
+              <a:t>8%–15% Bulk Sourcing Savings: </a:t>
+            </a:r>
+            <a:r>
+              <a:rPr sz="1200" b="0">
+                <a:latin typeface="Arial"/>
+              </a:rPr>
+              <a:t>Combines common purchasing demand across all oil companies to secure high-volume discounts on the Government e-Marketplace (GeM).</a:t>
             </a:r>
           </a:p>
           <a:p>
@@ -9053,7 +9085,7 @@
               </a:spcAft>
             </a:pPr>
             <a:r>
-              <a:rPr sz="1200">
+              <a:rPr sz="1200" b="0">
                 <a:latin typeface="Arial"/>
               </a:rPr>
               <a:t>• </a:t>
@@ -9062,13 +9094,13 @@
               <a:rPr sz="1200" b="1">
                 <a:latin typeface="Arial"/>
               </a:rPr>
-              <a:t>Avoided Spot-Purchase Premiums: </a:t>
-            </a:r>
-            <a:r>
-              <a:rPr sz="1200">
-                <a:latin typeface="Arial"/>
-              </a:rPr>
-              <a:t>Prevents expensive spot-market emergency purchases and air-freight logistics during forced unit outages.</a:t>
+              <a:t>Eliminates Rush-Purchase Premiums: </a:t>
+            </a:r>
+            <a:r>
+              <a:rPr sz="1200" b="0">
+                <a:latin typeface="Arial"/>
+              </a:rPr>
+              <a:t>Avoids paying inflated spot-market prices and expensive emergency air-freight shipping during sudden equipment breakdowns.</a:t>
             </a:r>
           </a:p>
           <a:p>
@@ -9078,7 +9110,7 @@
               </a:spcAft>
             </a:pPr>
             <a:r>
-              <a:rPr sz="1200">
+              <a:rPr sz="1200" b="0">
                 <a:latin typeface="Arial"/>
               </a:rPr>
               <a:t>• </a:t>
@@ -9087,13 +9119,13 @@
               <a:rPr sz="1200" b="1">
                 <a:latin typeface="Arial"/>
               </a:rPr>
-              <a:t>Optimized Warehouse Holding: </a:t>
-            </a:r>
-            <a:r>
-              <a:rPr sz="1200">
-                <a:latin typeface="Arial"/>
-              </a:rPr>
-              <a:t>Reduces inventory carrying costs (storage, insurance, obsolescence) by sharing slow-moving insurance spares.</a:t>
+              <a:t>Lower Warehouse Holding Costs: </a:t>
+            </a:r>
+            <a:r>
+              <a:rPr sz="1200" b="0">
+                <a:latin typeface="Arial"/>
+              </a:rPr>
+              <a:t>Reduces storage crowding, insurance fees, and obsolescence waste by sharing slow-moving backup and insurance spares.</a:t>
             </a:r>
           </a:p>
         </p:txBody>
@@ -9145,7 +9177,7 @@
               </a:spcAft>
             </a:pPr>
             <a:r>
-              <a:rPr sz="1200">
+              <a:rPr sz="1200" b="0">
                 <a:latin typeface="Arial"/>
               </a:rPr>
               <a:t>• </a:t>
@@ -9154,13 +9186,13 @@
               <a:rPr sz="1200" b="1">
                 <a:latin typeface="Arial"/>
               </a:rPr>
-              <a:t>Aatmanirbhar Bharat &amp; Energy Security: </a:t>
-            </a:r>
-            <a:r>
-              <a:rPr sz="1200">
-                <a:latin typeface="Arial"/>
-              </a:rPr>
-              <a:t>Builds sovereign Digital Public Infrastructure for Indian hydrocarbon materials, cutting foreign spot dependencies.</a:t>
+              <a:t>Aatmanirbhar Bharat: </a:t>
+            </a:r>
+            <a:r>
+              <a:rPr sz="1200" b="0">
+                <a:latin typeface="Arial"/>
+              </a:rPr>
+              <a:t>Builds sovereign digital infrastructure for India's energy sector, strengthening energy security and cutting foreign import dependency.</a:t>
             </a:r>
           </a:p>
           <a:p>
@@ -9170,7 +9202,7 @@
               </a:spcAft>
             </a:pPr>
             <a:r>
-              <a:rPr sz="1200">
+              <a:rPr sz="1200" b="0">
                 <a:latin typeface="Arial"/>
               </a:rPr>
               <a:t>• </a:t>
@@ -9182,10 +9214,10 @@
               <a:t>Zero Industrial Accidents: </a:t>
             </a:r>
             <a:r>
-              <a:rPr sz="1200">
-                <a:latin typeface="Arial"/>
-              </a:rPr>
-              <a:t>Strict ASME/ASTM engineering guardrails eliminate mismatched flanges/valves, preventing catastrophic leaks and fires.</a:t>
+              <a:rPr sz="1200" b="0">
+                <a:latin typeface="Arial"/>
+              </a:rPr>
+              <a:t>Strict ASME/ASTM safety guardrails eliminate mismatched valves and flanges, preventing hazardous leaks, explosions, and plant fires.</a:t>
             </a:r>
           </a:p>
           <a:p>
@@ -9195,7 +9227,7 @@
               </a:spcAft>
             </a:pPr>
             <a:r>
-              <a:rPr sz="1200">
+              <a:rPr sz="1200" b="0">
                 <a:latin typeface="Arial"/>
               </a:rPr>
               <a:t>• </a:t>
@@ -9204,13 +9236,13 @@
               <a:rPr sz="1200" b="1">
                 <a:latin typeface="Arial"/>
               </a:rPr>
-              <a:t>Reduced Carbon Footprint: </a:t>
-            </a:r>
-            <a:r>
-              <a:rPr sz="1200">
-                <a:latin typeface="Arial"/>
-              </a:rPr>
-              <a:t>Mobilizing existing domestic idle inventory eliminates unnecessary steel manufacturing and redundant freight emissions.</a:t>
+              <a:t>Greener Operations &amp; Lower Emissions: </a:t>
+            </a:r>
+            <a:r>
+              <a:rPr sz="1200" b="0">
+                <a:latin typeface="Arial"/>
+              </a:rPr>
+              <a:t>Mobilizing existing domestic surplus stock avoids unnecessary new steel manufacturing and cuts redundant transport emissions.</a:t>
             </a:r>
           </a:p>
           <a:p>
@@ -9220,7 +9252,7 @@
               </a:spcAft>
             </a:pPr>
             <a:r>
-              <a:rPr sz="1200">
+              <a:rPr sz="1200" b="0">
                 <a:latin typeface="Arial"/>
               </a:rPr>
               <a:t>• </a:t>
@@ -9229,13 +9261,13 @@
               <a:rPr sz="1200" b="1">
                 <a:latin typeface="Arial"/>
               </a:rPr>
-              <a:t>Inter-CPSE Harmonization: </a:t>
-            </a:r>
-            <a:r>
-              <a:rPr sz="1200">
-                <a:latin typeface="Arial"/>
-              </a:rPr>
-              <a:t>Pioneers cross-ministerial cooperation and shared resource governance across India's public sector giants.</a:t>
+              <a:t>Inter-PSU Collaboration: </a:t>
+            </a:r>
+            <a:r>
+              <a:rPr sz="1200" b="0">
+                <a:latin typeface="Arial"/>
+              </a:rPr>
+              <a:t>Pioneers seamless resource sharing and cooperative governance across India's premier public sector enterprises.</a:t>
             </a:r>
           </a:p>
         </p:txBody>
@@ -9423,12 +9455,9 @@
             </a:pPr>
             <a:r>
               <a:rPr sz="1300" b="1" dirty="0">
-                <a:solidFill>
-                  <a:srgbClr val="003366"/>
-                </a:solidFill>
-                <a:latin typeface="Arial"/>
-              </a:rPr>
-              <a:t>1. Engineering Standards &amp; Mechanical Specifications</a:t>
+                <a:latin typeface="Arial"/>
+              </a:rPr>
+              <a:t>1. Engineering Safety &amp; Quality Standards</a:t>
             </a:r>
             <a:endParaRPr kumimoji="0" lang="en-US" sz="2800" b="0" i="0" u="none" strike="noStrike" kern="1200" cap="none" spc="0" normalizeH="0" baseline="0" noProof="0" dirty="0">
               <a:ln>
@@ -9452,7 +9481,7 @@
               </a:spcAft>
             </a:pPr>
             <a:r>
-              <a:rPr sz="1200" dirty="0">
+              <a:rPr sz="1200" b="0" dirty="0">
                 <a:latin typeface="Arial"/>
               </a:rPr>
               <a:t>   • </a:t>
@@ -9464,10 +9493,10 @@
               <a:t>ASME B16.5 (2020): </a:t>
             </a:r>
             <a:r>
-              <a:rPr sz="1200" dirty="0">
-                <a:latin typeface="Arial"/>
-              </a:rPr>
-              <a:t>Pipe Flanges and Flanged Fittings (NPS 1/2 through NPS 24 Metric/Inch Standard) - Dimensional &amp; Pressure Ratings.</a:t>
+              <a:rPr sz="1200" b="0" dirty="0">
+                <a:latin typeface="Arial"/>
+              </a:rPr>
+              <a:t>Standard dimensions and pressure classes for industrial pipe flanges.</a:t>
             </a:r>
           </a:p>
           <a:p>
@@ -9477,7 +9506,7 @@
               </a:spcAft>
             </a:pPr>
             <a:r>
-              <a:rPr sz="1200" dirty="0">
+              <a:rPr sz="1200" b="0" dirty="0">
                 <a:latin typeface="Arial"/>
               </a:rPr>
               <a:t>   • </a:t>
@@ -9486,13 +9515,13 @@
               <a:rPr sz="1200" b="1" dirty="0">
                 <a:latin typeface="Arial"/>
               </a:rPr>
-              <a:t>ASTM Material Specifications: </a:t>
-            </a:r>
-            <a:r>
-              <a:rPr sz="1200" dirty="0">
-                <a:latin typeface="Arial"/>
-              </a:rPr>
-              <a:t>ASTM A105 (Carbon Steel), ASTM A182 (Forged Alloy/SS), ASTM A216 (WCB Castings), ASTM A350 (LF2 Low-Temp).</a:t>
+              <a:t>ASTM Specifications: </a:t>
+            </a:r>
+            <a:r>
+              <a:rPr sz="1200" b="0" dirty="0">
+                <a:latin typeface="Arial"/>
+              </a:rPr>
+              <a:t>Material grades for carbon steel (A105), stainless steel (A182), and cast steel (A216).</a:t>
             </a:r>
           </a:p>
           <a:p>
@@ -9502,7 +9531,7 @@
               </a:spcAft>
             </a:pPr>
             <a:r>
-              <a:rPr sz="1200" dirty="0">
+              <a:rPr sz="1200" b="0" dirty="0">
                 <a:latin typeface="Arial"/>
               </a:rPr>
               <a:t>   • </a:t>
@@ -9511,13 +9540,13 @@
               <a:rPr sz="1200" b="1" dirty="0">
                 <a:latin typeface="Arial"/>
               </a:rPr>
-              <a:t>API Specifications: </a:t>
-            </a:r>
-            <a:r>
-              <a:rPr sz="1200" dirty="0">
-                <a:latin typeface="Arial"/>
-              </a:rPr>
-              <a:t>API 6D (Specification for Pipeline Valves) and API 600 (Steel Gate Valves - Flanged/Butt-Welding).</a:t>
+              <a:t>API 6D &amp; API 600: </a:t>
+            </a:r>
+            <a:r>
+              <a:rPr sz="1200" b="0" dirty="0">
+                <a:latin typeface="Arial"/>
+              </a:rPr>
+              <a:t>Manufacturing and testing standards for pipeline valves and plant gate valves.</a:t>
             </a:r>
           </a:p>
           <a:p>
@@ -9530,13 +9559,22 @@
               </a:spcAft>
             </a:pPr>
             <a:r>
-              <a:rPr sz="1300" b="1" dirty="0">
-                <a:solidFill>
-                  <a:srgbClr val="003366"/>
-                </a:solidFill>
-                <a:latin typeface="Arial"/>
-              </a:rPr>
-              <a:t>2. Machine Learning, NLP &amp; Information Retrieval</a:t>
+              <a:rPr sz="1200" b="0" dirty="0">
+                <a:latin typeface="Arial"/>
+              </a:rPr>
+              <a:t>   • </a:t>
+            </a:r>
+            <a:r>
+              <a:rPr sz="1200" b="1" dirty="0">
+                <a:latin typeface="Arial"/>
+              </a:rPr>
+              <a:t>EN 10204 (3.1): </a:t>
+            </a:r>
+            <a:r>
+              <a:rPr sz="1200" b="0" dirty="0">
+                <a:latin typeface="Arial"/>
+              </a:rPr>
+              <a:t>International standard for Mill Test Certificates (MTCs) and material traceability.</a:t>
             </a:r>
           </a:p>
           <a:p>
@@ -9546,34 +9584,10 @@
               </a:spcAft>
             </a:pPr>
             <a:r>
-              <a:rPr sz="1200" dirty="0">
-                <a:latin typeface="Arial"/>
-              </a:rPr>
-              <a:t>   • </a:t>
-            </a:r>
-            <a:r>
-              <a:rPr sz="1200" b="1" dirty="0">
-                <a:latin typeface="Arial"/>
-              </a:rPr>
-              <a:t>DeBERTa-v3: </a:t>
-            </a:r>
-            <a:r>
-              <a:rPr sz="1200" dirty="0">
-                <a:latin typeface="Arial"/>
-              </a:rPr>
-              <a:t>He, P., et al. (ICLR 2021). 'DeBERTaV3: Improving </a:t>
-            </a:r>
-            <a:r>
-              <a:rPr sz="1200" dirty="0" err="1">
-                <a:latin typeface="Arial"/>
-              </a:rPr>
-              <a:t>DeBERTa</a:t>
-            </a:r>
-            <a:r>
-              <a:rPr sz="1200" dirty="0">
-                <a:latin typeface="Arial"/>
-              </a:rPr>
-              <a:t> using ELECTRA-Style Pre-Training' (Domain NER Token Classification).</a:t>
+              <a:rPr sz="1300" b="1" dirty="0">
+                <a:latin typeface="Arial"/>
+              </a:rPr>
+              <a:t>2. Artificial Intelligence &amp; Smart Search</a:t>
             </a:r>
           </a:p>
           <a:p>
@@ -9583,7 +9597,7 @@
               </a:spcAft>
             </a:pPr>
             <a:r>
-              <a:rPr sz="1200" dirty="0">
+              <a:rPr sz="1200" b="0" dirty="0">
                 <a:latin typeface="Arial"/>
               </a:rPr>
               <a:t>   • </a:t>
@@ -9592,25 +9606,13 @@
               <a:rPr sz="1200" b="1" dirty="0">
                 <a:latin typeface="Arial"/>
               </a:rPr>
-              <a:t>BGE-M3 Embeddings: </a:t>
-            </a:r>
-            <a:r>
-              <a:rPr sz="1200" dirty="0">
-                <a:latin typeface="Arial"/>
-              </a:rPr>
-              <a:t>Chen, J., et al. (2024). 'BGE-M3: Multi-Functionality, Multi-</a:t>
-            </a:r>
-            <a:r>
-              <a:rPr sz="1200" dirty="0" err="1">
-                <a:latin typeface="Arial"/>
-              </a:rPr>
-              <a:t>Linguality</a:t>
-            </a:r>
-            <a:r>
-              <a:rPr sz="1200" dirty="0">
-                <a:latin typeface="Arial"/>
-              </a:rPr>
-              <a:t>, and Multi-Granularity Embeddings' (Dense Vector Retrieval).</a:t>
+              <a:t>DeBERTa-v3 (ICLR 2021): </a:t>
+            </a:r>
+            <a:r>
+              <a:rPr sz="1200" b="0" dirty="0">
+                <a:latin typeface="Arial"/>
+              </a:rPr>
+              <a:t>Domain-adapted AI model for extracting physical attributes (size, rating, metallurgy) from messy text.</a:t>
             </a:r>
           </a:p>
           <a:p>
@@ -9620,7 +9622,7 @@
               </a:spcAft>
             </a:pPr>
             <a:r>
-              <a:rPr sz="1200" dirty="0">
+              <a:rPr sz="1200" b="0" dirty="0">
                 <a:latin typeface="Arial"/>
               </a:rPr>
               <a:t>   • </a:t>
@@ -9629,25 +9631,13 @@
               <a:rPr sz="1200" b="1" dirty="0">
                 <a:latin typeface="Arial"/>
               </a:rPr>
-              <a:t>HNSW Vector Indexing: </a:t>
-            </a:r>
-            <a:r>
-              <a:rPr sz="1200" dirty="0">
-                <a:latin typeface="Arial"/>
-              </a:rPr>
-              <a:t>Malkov, Y. A., &amp; </a:t>
-            </a:r>
-            <a:r>
-              <a:rPr sz="1200" dirty="0" err="1">
-                <a:latin typeface="Arial"/>
-              </a:rPr>
-              <a:t>Yashunin</a:t>
-            </a:r>
-            <a:r>
-              <a:rPr sz="1200" dirty="0">
-                <a:latin typeface="Arial"/>
-              </a:rPr>
-              <a:t>, D. A. (IEEE TPAMI 2018). 'Efficient and Robust Approximate Nearest Neighbor Search Using HNSW Graphs.'</a:t>
+              <a:t>BGE-M3 Embeddings: </a:t>
+            </a:r>
+            <a:r>
+              <a:rPr sz="1200" b="0" dirty="0">
+                <a:latin typeface="Arial"/>
+              </a:rPr>
+              <a:t>Multi-granularity embedding model for fast cross-dialect semantic similarity matching.</a:t>
             </a:r>
           </a:p>
           <a:p>
@@ -9660,13 +9650,34 @@
               </a:spcAft>
             </a:pPr>
             <a:r>
-              <a:rPr sz="1300" b="1" dirty="0">
-                <a:solidFill>
-                  <a:srgbClr val="003366"/>
-                </a:solidFill>
-                <a:latin typeface="Arial"/>
-              </a:rPr>
-              <a:t>3. Document Intelligence &amp; Computer Vision</a:t>
+              <a:rPr sz="1200" b="0" dirty="0">
+                <a:latin typeface="Arial"/>
+              </a:rPr>
+              <a:t>   • </a:t>
+            </a:r>
+            <a:r>
+              <a:rPr sz="1200" b="1" dirty="0">
+                <a:latin typeface="Arial"/>
+              </a:rPr>
+              <a:t>HNSW Vector Indexing: </a:t>
+            </a:r>
+            <a:r>
+              <a:rPr sz="1200" b="0" dirty="0">
+                <a:latin typeface="Arial"/>
+              </a:rPr>
+              <a:t>High-speed graph search in </a:t>
+            </a:r>
+            <a:r>
+              <a:rPr sz="1200" b="0">
+                <a:latin typeface="Arial"/>
+              </a:rPr>
+              <a:t>Qdrant</a:t>
+            </a:r>
+            <a:r>
+              <a:rPr sz="1200" b="0" dirty="0">
+                <a:latin typeface="Arial"/>
+              </a:rPr>
+              <a:t> delivering candidate retrieval in under 15 milliseconds.</a:t>
             </a:r>
           </a:p>
           <a:p>
@@ -9676,28 +9687,10 @@
               </a:spcAft>
             </a:pPr>
             <a:r>
-              <a:rPr sz="1200" dirty="0">
-                <a:latin typeface="Arial"/>
-              </a:rPr>
-              <a:t>   • </a:t>
-            </a:r>
-            <a:r>
-              <a:rPr sz="1200" b="1" dirty="0" err="1">
-                <a:latin typeface="Arial"/>
-              </a:rPr>
-              <a:t>PaddleOCR</a:t>
-            </a:r>
-            <a:r>
-              <a:rPr sz="1200" b="1" dirty="0">
-                <a:latin typeface="Arial"/>
-              </a:rPr>
-              <a:t> (PP-OCRv4): </a:t>
-            </a:r>
-            <a:r>
-              <a:rPr sz="1200" dirty="0">
-                <a:latin typeface="Arial"/>
-              </a:rPr>
-              <a:t>Du, Y., et al. (2023). 'PP-OCR: A Practical Ultra Lightweight OCR System' (Direction detection &amp; angle classification).</a:t>
+              <a:rPr sz="1300" b="1" dirty="0">
+                <a:latin typeface="Arial"/>
+              </a:rPr>
+              <a:t>3. Document Intelligence &amp; Computer Vision</a:t>
             </a:r>
           </a:p>
           <a:p>
@@ -9707,7 +9700,7 @@
               </a:spcAft>
             </a:pPr>
             <a:r>
-              <a:rPr sz="1200" dirty="0">
+              <a:rPr sz="1200" b="0" dirty="0">
                 <a:latin typeface="Arial"/>
               </a:rPr>
               <a:t>   • </a:t>
@@ -9716,31 +9709,19 @@
               <a:rPr sz="1200" b="1" dirty="0" err="1">
                 <a:latin typeface="Arial"/>
               </a:rPr>
-              <a:t>PyMuPDF</a:t>
+              <a:t>PaddleOCR</a:t>
             </a:r>
             <a:r>
               <a:rPr sz="1200" b="1" dirty="0">
                 <a:latin typeface="Arial"/>
               </a:rPr>
-              <a:t>: </a:t>
-            </a:r>
-            <a:r>
-              <a:rPr sz="1200" dirty="0">
-                <a:latin typeface="Arial"/>
-              </a:rPr>
-              <a:t>McKie, P., &amp; Liu, R. 'High-Performance Document Processing with </a:t>
-            </a:r>
-            <a:r>
-              <a:rPr sz="1200" dirty="0" err="1">
-                <a:latin typeface="Arial"/>
-              </a:rPr>
-              <a:t>MuPDF</a:t>
-            </a:r>
-            <a:r>
-              <a:rPr sz="1200" dirty="0">
-                <a:latin typeface="Arial"/>
-              </a:rPr>
-              <a:t>' (Direct digital text stream extraction).</a:t>
+              <a:t> (PP-OCRv4): </a:t>
+            </a:r>
+            <a:r>
+              <a:rPr sz="1200" b="0" dirty="0">
+                <a:latin typeface="Arial"/>
+              </a:rPr>
+              <a:t>Ultra-lightweight OCR with automatic angle correction for rotated delivery slips and equipment nameplates.</a:t>
             </a:r>
           </a:p>
           <a:p>
@@ -9750,22 +9731,28 @@
               </a:spcAft>
             </a:pPr>
             <a:r>
-              <a:rPr sz="1200" dirty="0">
+              <a:rPr sz="1200" b="0" dirty="0">
                 <a:latin typeface="Arial"/>
               </a:rPr>
               <a:t>   • </a:t>
             </a:r>
             <a:r>
+              <a:rPr sz="1200" b="1" dirty="0" err="1">
+                <a:latin typeface="Arial"/>
+              </a:rPr>
+              <a:t>PyMuPDF</a:t>
+            </a:r>
+            <a:r>
               <a:rPr sz="1200" b="1" dirty="0">
                 <a:latin typeface="Arial"/>
               </a:rPr>
-              <a:t>EN 10204 (Types 3.1 &amp; 3.2): </a:t>
-            </a:r>
-            <a:r>
-              <a:rPr sz="1200" dirty="0">
-                <a:latin typeface="Arial"/>
-              </a:rPr>
-              <a:t>Metallic Products - Types of Inspection Documents for Mill Test Certificates (MTCs).</a:t>
+              <a:t>: </a:t>
+            </a:r>
+            <a:r>
+              <a:rPr sz="1200" b="0" dirty="0">
+                <a:latin typeface="Arial"/>
+              </a:rPr>
+              <a:t>High-performance engine for sub-50ms text and table stream extraction from native digital PDF certificates.</a:t>
             </a:r>
           </a:p>
           <a:p>
@@ -9779,12 +9766,9 @@
             </a:pPr>
             <a:r>
               <a:rPr sz="1300" b="1" dirty="0">
-                <a:solidFill>
-                  <a:srgbClr val="003366"/>
-                </a:solidFill>
-                <a:latin typeface="Arial"/>
-              </a:rPr>
-              <a:t>4. Public Procurement Policies &amp; Taxonomies</a:t>
+                <a:latin typeface="Arial"/>
+              </a:rPr>
+              <a:t>4. Public Procurement &amp; Government Taxonomies</a:t>
             </a:r>
           </a:p>
           <a:p>
@@ -9794,7 +9778,7 @@
               </a:spcAft>
             </a:pPr>
             <a:r>
-              <a:rPr sz="1200" dirty="0">
+              <a:rPr sz="1200" b="0" dirty="0">
                 <a:latin typeface="Arial"/>
               </a:rPr>
               <a:t>   • </a:t>
@@ -9818,10 +9802,10 @@
               <a:t>: </a:t>
             </a:r>
             <a:r>
-              <a:rPr sz="1200" dirty="0">
-                <a:latin typeface="Arial"/>
-              </a:rPr>
-              <a:t>United Nations Standard Products &amp; Services Code (Segment 40) and Government e-Marketplace Category Schema.</a:t>
+              <a:rPr sz="1200" b="0" dirty="0">
+                <a:latin typeface="Arial"/>
+              </a:rPr>
+              <a:t>Standardized commodity codes and Government e-Marketplace schemas for public procurement.</a:t>
             </a:r>
           </a:p>
           <a:p>
@@ -9831,7 +9815,7 @@
               </a:spcAft>
             </a:pPr>
             <a:r>
-              <a:rPr sz="1200" dirty="0">
+              <a:rPr sz="1200" b="0" dirty="0">
                 <a:latin typeface="Arial"/>
               </a:rPr>
               <a:t>   • </a:t>
@@ -9849,10 +9833,10 @@
               <a:t> &amp; DPE Directives: </a:t>
             </a:r>
             <a:r>
-              <a:rPr sz="1200" dirty="0">
-                <a:latin typeface="Arial"/>
-              </a:rPr>
-              <a:t>Department of Public Enterprises Guidelines on Inter-Enterprise Inventory Optimization &amp; Working Capital Rationalization in CPSEs.</a:t>
+              <a:rPr sz="1200" b="0" dirty="0">
+                <a:latin typeface="Arial"/>
+              </a:rPr>
+              <a:t>Department of Public Enterprises guidelines on inventory rationalization and inter-PSU resource sharing.</a:t>
             </a:r>
           </a:p>
         </p:txBody>

--- a/SIH_Presentation.pptx
+++ b/SIH_Presentation.pptx
@@ -5691,11 +5691,14 @@
               <a:t>Team ID: </a:t>
             </a:r>
             <a:r>
-              <a:rPr sz="2000" b="0" dirty="0">
-                <a:latin typeface="Arial"/>
-              </a:rPr>
-              <a:t>[Your Team ID]</a:t>
-            </a:r>
+              <a:rPr lang="en-US" sz="2000" b="0" dirty="0">
+                <a:latin typeface="Arial"/>
+              </a:rPr>
+              <a:t>#81</a:t>
+            </a:r>
+            <a:endParaRPr sz="2000" b="0" dirty="0">
+              <a:latin typeface="Arial"/>
+            </a:endParaRPr>
           </a:p>
           <a:p>
             <a:pPr>
@@ -5784,6 +5787,18 @@
   <p:clrMapOvr>
     <a:masterClrMapping/>
   </p:clrMapOvr>
+  <mc:AlternateContent xmlns:mc="http://schemas.openxmlformats.org/markup-compatibility/2006">
+    <mc:Choice xmlns:p14="http://schemas.microsoft.com/office/powerpoint/2010/main" Requires="p14">
+      <p:transition spd="med" p14:dur="700">
+        <p:fade/>
+      </p:transition>
+    </mc:Choice>
+    <mc:Fallback>
+      <p:transition spd="med">
+        <p:fade/>
+      </p:transition>
+    </mc:Fallback>
+  </mc:AlternateContent>
 </p:sld>
 </file>
 
@@ -5974,8 +5989,8 @@
           <a:p>
             <a:pPr algn="ctr"/>
             <a:r>
-              <a:rPr lang="en-US" dirty="0"/>
-              <a:t>Team Name</a:t>
+              <a:rPr lang="en-US" dirty="0" err="1"/>
+              <a:t>BharatCodex</a:t>
             </a:r>
             <a:endParaRPr lang="en-IN" dirty="0"/>
           </a:p>
@@ -6190,10 +6205,22 @@
               <a:rPr sz="1300" b="0" dirty="0">
                 <a:latin typeface="Arial"/>
               </a:rPr>
-              <a:t>Companies keep using their existing SAP/Oracle item codes—</a:t>
-            </a:r>
-            <a:r>
-              <a:rPr sz="1300" b="0" dirty="0" err="1">
+              <a:t>Companies keep using their existing SAP/Oracle item </a:t>
+            </a:r>
+            <a:r>
+              <a:rPr sz="1300" b="0">
+                <a:latin typeface="Arial"/>
+              </a:rPr>
+              <a:t>codes</a:t>
+            </a:r>
+            <a:r>
+              <a:rPr lang="en-US" sz="1300">
+                <a:latin typeface="Arial"/>
+              </a:rPr>
+              <a:t>. </a:t>
+            </a:r>
+            <a:r>
+              <a:rPr sz="1300" b="0">
                 <a:latin typeface="Arial"/>
               </a:rPr>
               <a:t>Samanvay</a:t>
@@ -6391,6 +6418,9 @@
   <p:clrMapOvr>
     <a:masterClrMapping/>
   </p:clrMapOvr>
+  <p:transition spd="slow">
+    <p:wipe/>
+  </p:transition>
 </p:sld>
 </file>
 
@@ -6578,8 +6608,8 @@
           <a:p>
             <a:pPr algn="ctr"/>
             <a:r>
-              <a:rPr lang="en-US" dirty="0"/>
-              <a:t>Your Team Name</a:t>
+              <a:rPr lang="en-US" dirty="0" err="1"/>
+              <a:t>BharatCodex</a:t>
             </a:r>
             <a:endParaRPr lang="en-IN" dirty="0"/>
           </a:p>
@@ -6630,7 +6660,7 @@
           <p:nvPr>
             <p:extLst>
               <p:ext uri="{D42A27DB-BD31-4B8C-83A1-F6EECF244321}">
-                <p14:modId xmlns:p14="http://schemas.microsoft.com/office/powerpoint/2010/main" val="2594096567"/>
+                <p14:modId xmlns:p14="http://schemas.microsoft.com/office/powerpoint/2010/main" val="2879413759"/>
               </p:ext>
             </p:extLst>
           </p:nvPr>
@@ -6813,10 +6843,34 @@
                     <a:lstStyle/>
                     <a:p>
                       <a:r>
-                        <a:rPr sz="1000" b="0"/>
-                        <a:t>PaddleOCR, PyMuPDF, DeBERTa-v3, BGE-M3</a:t>
+                        <a:rPr sz="1000" b="0" dirty="0" err="1"/>
+                        <a:t>PaddleOCR</a:t>
                       </a:r>
-                      <a:endParaRPr sz="1000" b="0">
+                      <a:r>
+                        <a:rPr lang="en-US" sz="1000" b="0" dirty="0"/>
+                        <a:t>/</a:t>
+                      </a:r>
+                      <a:r>
+                        <a:rPr sz="1000" b="0" dirty="0" err="1"/>
+                        <a:t>PyMuPDF</a:t>
+                      </a:r>
+                      <a:r>
+                        <a:rPr lang="en-US" sz="1000" b="0" dirty="0"/>
+                        <a:t>/</a:t>
+                      </a:r>
+                      <a:r>
+                        <a:rPr lang="en-US" sz="1000" b="0" dirty="0" err="1"/>
+                        <a:t>PDFPlumber</a:t>
+                      </a:r>
+                      <a:r>
+                        <a:rPr lang="en-US" sz="1000" b="0" dirty="0"/>
+                        <a:t> or related</a:t>
+                      </a:r>
+                      <a:r>
+                        <a:rPr sz="1000" b="0" dirty="0"/>
+                        <a:t>, DeBERTa-v3, BGE-M3</a:t>
+                      </a:r>
+                      <a:endParaRPr sz="1000" b="0" dirty="0">
                         <a:latin typeface="Arial"/>
                       </a:endParaRPr>
                     </a:p>
@@ -7258,7 +7312,7 @@
         <p:spPr>
           <a:xfrm>
             <a:off x="329773" y="1095375"/>
-            <a:ext cx="2515563" cy="1446550"/>
+            <a:ext cx="2515563" cy="1554272"/>
           </a:xfrm>
           <a:prstGeom prst="rect">
             <a:avLst/>
@@ -7316,7 +7370,7 @@
                 <a:latin typeface="Arial" panose="020B0604020202020204" pitchFamily="34" charset="0"/>
                 <a:cs typeface="Arial" panose="020B0604020202020204" pitchFamily="34" charset="0"/>
               </a:rPr>
-              <a:t> + </a:t>
+              <a:t>/</a:t>
             </a:r>
             <a:r>
               <a:rPr lang="en-IN" sz="1050" dirty="0" err="1">
@@ -7324,6 +7378,20 @@
                 <a:cs typeface="Arial" panose="020B0604020202020204" pitchFamily="34" charset="0"/>
               </a:rPr>
               <a:t>PyMuPDF</a:t>
+            </a:r>
+            <a:r>
+              <a:rPr lang="en-IN" sz="1050" dirty="0">
+                <a:latin typeface="Arial" panose="020B0604020202020204" pitchFamily="34" charset="0"/>
+                <a:cs typeface="Arial" panose="020B0604020202020204" pitchFamily="34" charset="0"/>
+              </a:rPr>
+              <a:t>/</a:t>
+            </a:r>
+            <a:r>
+              <a:rPr lang="en-IN" sz="1050" dirty="0" err="1">
+                <a:latin typeface="Arial" panose="020B0604020202020204" pitchFamily="34" charset="0"/>
+                <a:cs typeface="Arial" panose="020B0604020202020204" pitchFamily="34" charset="0"/>
+              </a:rPr>
+              <a:t>PDFPlumber</a:t>
             </a:r>
             <a:r>
               <a:rPr lang="en-IN" sz="1050" dirty="0">
@@ -7564,7 +7632,7 @@
         <p:spPr>
           <a:xfrm>
             <a:off x="8841785" y="1059580"/>
-            <a:ext cx="2515563" cy="1708160"/>
+            <a:ext cx="2673612" cy="1546577"/>
           </a:xfrm>
           <a:prstGeom prst="rect">
             <a:avLst/>
@@ -7652,9 +7720,9 @@
           <p:nvPr/>
         </p:nvCxnSpPr>
         <p:spPr>
-          <a:xfrm>
+          <a:xfrm flipV="1">
             <a:off x="2845336" y="1818650"/>
-            <a:ext cx="471605" cy="0"/>
+            <a:ext cx="471605" cy="53861"/>
           </a:xfrm>
           <a:prstGeom prst="straightConnector1">
             <a:avLst/>
@@ -7761,6 +7829,9 @@
   <p:clrMapOvr>
     <a:masterClrMapping/>
   </p:clrMapOvr>
+  <p:transition spd="slow">
+    <p:wipe/>
+  </p:transition>
 </p:sld>
 </file>
 
@@ -8014,8 +8085,8 @@
           <a:p>
             <a:pPr algn="ctr"/>
             <a:r>
-              <a:rPr lang="en-US" dirty="0"/>
-              <a:t>Your Team Name</a:t>
+              <a:rPr lang="en-US" dirty="0" err="1"/>
+              <a:t>BharatCodex</a:t>
             </a:r>
             <a:endParaRPr lang="en-IN" dirty="0"/>
           </a:p>
@@ -8066,7 +8137,7 @@
         <p:spPr>
           <a:xfrm>
             <a:off x="404640" y="1439199"/>
-            <a:ext cx="3632219" cy="1446550"/>
+            <a:ext cx="3632219" cy="877163"/>
           </a:xfrm>
           <a:prstGeom prst="rect">
             <a:avLst/>
@@ -8091,7 +8162,19 @@
               <a:rPr sz="1200" b="0" dirty="0">
                 <a:latin typeface="Arial"/>
               </a:rPr>
-              <a:t>Searches through 10+ million spare parts in under 15 milliseconds, handling large enterprise catalog uploads with instant safety checks.</a:t>
+              <a:t>Searches through </a:t>
+            </a:r>
+            <a:r>
+              <a:rPr lang="en-US" sz="1200" b="0" dirty="0">
+                <a:latin typeface="Arial"/>
+              </a:rPr>
+              <a:t>100,000 </a:t>
+            </a:r>
+            <a:r>
+              <a:rPr sz="1200" b="0" dirty="0">
+                <a:latin typeface="Arial"/>
+              </a:rPr>
+              <a:t>spare parts in under 15 milliseconds, handling large enterprise catalog uploads with instant safety checks.</a:t>
             </a:r>
           </a:p>
         </p:txBody>
@@ -8126,14 +8209,14 @@
           <a:p>
             <a:pPr algn="just"/>
             <a:r>
-              <a:rPr sz="1500" b="1">
+              <a:rPr sz="1500" b="1" dirty="0">
                 <a:latin typeface="Arial"/>
               </a:rPr>
               <a:t>Operational Ease
 </a:t>
             </a:r>
             <a:r>
-              <a:rPr sz="1200" b="0">
+              <a:rPr sz="1200" b="0" dirty="0">
                 <a:latin typeface="Arial"/>
               </a:rPr>
               <a:t>Reads both clear digital PDFs and blurry mobile scans; intuitive web dashboard requires zero special training for warehouse and plant staff.</a:t>
@@ -8556,6 +8639,9 @@
   <p:clrMapOvr>
     <a:masterClrMapping/>
   </p:clrMapOvr>
+  <p:transition spd="slow">
+    <p:wipe/>
+  </p:transition>
 </p:sld>
 </file>
 
@@ -8809,8 +8895,8 @@
           <a:p>
             <a:pPr algn="ctr"/>
             <a:r>
-              <a:rPr lang="en-US" dirty="0"/>
-              <a:t>Your Team Name</a:t>
+              <a:rPr lang="en-US" dirty="0" err="1"/>
+              <a:t>BharatCodex</a:t>
             </a:r>
             <a:endParaRPr lang="en-IN" dirty="0"/>
           </a:p>
@@ -8861,7 +8947,7 @@
         <p:spPr>
           <a:xfrm>
             <a:off x="609600" y="1400092"/>
-            <a:ext cx="3632219" cy="4389120"/>
+            <a:ext cx="3632219" cy="3544560"/>
           </a:xfrm>
           <a:prstGeom prst="rect">
             <a:avLst/>
@@ -8880,110 +8966,134 @@
               </a:spcAft>
             </a:pPr>
             <a:r>
-              <a:rPr sz="1600" b="1">
+              <a:rPr sz="1600" b="1" dirty="0">
                 <a:latin typeface="Arial"/>
               </a:rPr>
               <a:t>Target Audience &amp; Operations</a:t>
             </a:r>
           </a:p>
           <a:p>
-            <a:pPr>
+            <a:pPr algn="just">
               <a:spcAft>
                 <a:spcPts val="800"/>
               </a:spcAft>
             </a:pPr>
             <a:r>
-              <a:rPr sz="1200" b="0">
+              <a:rPr sz="1200" b="0" dirty="0">
                 <a:latin typeface="Arial"/>
               </a:rPr>
               <a:t>• </a:t>
             </a:r>
             <a:r>
-              <a:rPr sz="1200" b="1">
+              <a:rPr sz="1200" b="1" dirty="0">
                 <a:latin typeface="Arial"/>
               </a:rPr>
               <a:t>Who It Helps: </a:t>
             </a:r>
             <a:r>
-              <a:rPr sz="1200" b="0">
-                <a:latin typeface="Arial"/>
-              </a:rPr>
-              <a:t>Ministry of Petroleum (MoPNG), Oil PSUs (IOCL, ONGC, BPCL, HPCL, GAIL), refinery engineers, and depot purchase managers.</a:t>
-            </a:r>
-          </a:p>
-          <a:p>
-            <a:pPr>
+              <a:rPr sz="1200" b="0" dirty="0">
+                <a:latin typeface="Arial"/>
+              </a:rPr>
+              <a:t>Ministry of Petroleum (</a:t>
+            </a:r>
+            <a:r>
+              <a:rPr sz="1200" b="0" dirty="0" err="1">
+                <a:latin typeface="Arial"/>
+              </a:rPr>
+              <a:t>MoPNG</a:t>
+            </a:r>
+            <a:r>
+              <a:rPr sz="1200" b="0" dirty="0">
+                <a:latin typeface="Arial"/>
+              </a:rPr>
+              <a:t>), Oil PSUs (IOCL, ONGC, BPCL, HPCL, GAIL), refinery engineers, and depot purchase managers.</a:t>
+            </a:r>
+          </a:p>
+          <a:p>
+            <a:pPr algn="just">
               <a:spcAft>
                 <a:spcPts val="800"/>
               </a:spcAft>
             </a:pPr>
             <a:r>
-              <a:rPr sz="1200" b="0">
+              <a:rPr sz="1200" b="0" dirty="0">
                 <a:latin typeface="Arial"/>
               </a:rPr>
               <a:t>• </a:t>
             </a:r>
             <a:r>
-              <a:rPr sz="1200" b="1">
+              <a:rPr sz="1200" b="1" dirty="0">
                 <a:latin typeface="Arial"/>
               </a:rPr>
               <a:t>Emergency Spares in Under 48 Hours: </a:t>
             </a:r>
             <a:r>
-              <a:rPr sz="1200" b="0">
+              <a:rPr sz="1200" b="0" dirty="0">
                 <a:latin typeface="Arial"/>
               </a:rPr>
               <a:t>Cuts spare part procurement time from 4–6 weeks of public tendering down to under 48 hours via sister company depots.</a:t>
             </a:r>
           </a:p>
           <a:p>
-            <a:pPr>
+            <a:pPr algn="just">
               <a:spcAft>
                 <a:spcPts val="800"/>
               </a:spcAft>
             </a:pPr>
             <a:r>
-              <a:rPr sz="1200" b="0">
+              <a:rPr sz="1200" b="0" dirty="0">
                 <a:latin typeface="Arial"/>
               </a:rPr>
               <a:t>• </a:t>
             </a:r>
             <a:r>
-              <a:rPr sz="1200" b="1">
+              <a:rPr sz="1200" b="1" dirty="0">
                 <a:latin typeface="Arial"/>
               </a:rPr>
               <a:t>Cleans Up to 35% Duplicate Items: </a:t>
             </a:r>
             <a:r>
-              <a:rPr sz="1200" b="0">
+              <a:rPr sz="1200" b="0" dirty="0">
                 <a:latin typeface="Arial"/>
               </a:rPr>
               <a:t>Eliminates confusing duplicate item codes across legacy SAP systems, creating one clean, standardized master catalog.</a:t>
             </a:r>
           </a:p>
           <a:p>
-            <a:pPr>
+            <a:pPr algn="just">
               <a:spcAft>
                 <a:spcPts val="800"/>
               </a:spcAft>
             </a:pPr>
             <a:r>
-              <a:rPr sz="1200" b="0">
+              <a:rPr sz="1200" b="0" dirty="0">
                 <a:latin typeface="Arial"/>
               </a:rPr>
               <a:t>• </a:t>
             </a:r>
             <a:r>
-              <a:rPr sz="1200" b="1">
+              <a:rPr sz="1200" b="1" dirty="0">
                 <a:latin typeface="Arial"/>
               </a:rPr>
               <a:t>Prevents Costly Plant Shutdowns: </a:t>
             </a:r>
             <a:r>
-              <a:rPr sz="1200" b="0">
-                <a:latin typeface="Arial"/>
-              </a:rPr>
-              <a:t>Locates emergency replacement spares immediately, avoiding unplanned refinery outages that cost over ₹40 Lakhs per hour.</a:t>
+              <a:rPr sz="1200" b="0" dirty="0">
+                <a:latin typeface="Arial"/>
+              </a:rPr>
+              <a:t>Locates emergency replacement spares immediately, avoiding unplanned refinery outages that cost over </a:t>
+            </a:r>
+            <a:r>
+              <a:rPr lang="en-US" sz="1200" dirty="0">
+                <a:latin typeface="Arial"/>
+              </a:rPr>
+              <a:t>upwards to Tens of</a:t>
+            </a:r>
+            <a:r>
+              <a:rPr sz="1200" b="0" dirty="0">
+                <a:latin typeface="Arial"/>
+              </a:rPr>
+              <a:t> Lakhs per hour.</a:t>
             </a:r>
           </a:p>
         </p:txBody>
@@ -9003,7 +9113,7 @@
         <p:spPr>
           <a:xfrm>
             <a:off x="4484850" y="1400092"/>
-            <a:ext cx="3632219" cy="4389120"/>
+            <a:ext cx="3632219" cy="3544560"/>
           </a:xfrm>
           <a:prstGeom prst="rect">
             <a:avLst/>
@@ -9022,107 +9132,143 @@
               </a:spcAft>
             </a:pPr>
             <a:r>
-              <a:rPr sz="1600" b="1">
+              <a:rPr sz="1600" b="1" dirty="0">
                 <a:latin typeface="Arial"/>
               </a:rPr>
               <a:t>Economic &amp; Financial Impact</a:t>
             </a:r>
           </a:p>
           <a:p>
-            <a:pPr>
+            <a:pPr algn="just">
               <a:spcAft>
                 <a:spcPts val="800"/>
               </a:spcAft>
             </a:pPr>
             <a:r>
-              <a:rPr sz="1200" b="0">
+              <a:rPr sz="1200" b="0" dirty="0">
                 <a:latin typeface="Arial"/>
               </a:rPr>
               <a:t>• </a:t>
             </a:r>
             <a:r>
-              <a:rPr sz="1200" b="1">
-                <a:latin typeface="Arial"/>
-              </a:rPr>
-              <a:t>Unlocks ₹1,500+ Crores: </a:t>
-            </a:r>
-            <a:r>
-              <a:rPr sz="1200" b="0">
-                <a:latin typeface="Arial"/>
-              </a:rPr>
-              <a:t>Frees 15%–25% of dormant working capital trapped in idle, duplicate inventory across MoPNG enterprises.</a:t>
-            </a:r>
-          </a:p>
-          <a:p>
-            <a:pPr>
+              <a:rPr sz="1200" b="1" dirty="0">
+                <a:latin typeface="Arial"/>
+              </a:rPr>
+              <a:t>Unlocks ₹</a:t>
+            </a:r>
+            <a:r>
+              <a:rPr lang="en-US" sz="1200" b="1" dirty="0">
+                <a:latin typeface="Arial"/>
+              </a:rPr>
+              <a:t>100</a:t>
+            </a:r>
+            <a:r>
+              <a:rPr sz="1200" b="1" dirty="0">
+                <a:latin typeface="Arial"/>
+              </a:rPr>
+              <a:t>+ Crores: </a:t>
+            </a:r>
+            <a:r>
+              <a:rPr sz="1200" b="0" dirty="0">
+                <a:latin typeface="Arial"/>
+              </a:rPr>
+              <a:t>Frees 15%–25% of dormant working capital trapped in idle, duplicate inventory across </a:t>
+            </a:r>
+            <a:r>
+              <a:rPr sz="1200" b="0" dirty="0" err="1">
+                <a:latin typeface="Arial"/>
+              </a:rPr>
+              <a:t>MoPNG</a:t>
+            </a:r>
+            <a:r>
+              <a:rPr sz="1200" b="0" dirty="0">
+                <a:latin typeface="Arial"/>
+              </a:rPr>
+              <a:t> enterprises.</a:t>
+            </a:r>
+          </a:p>
+          <a:p>
+            <a:pPr algn="just">
               <a:spcAft>
                 <a:spcPts val="800"/>
               </a:spcAft>
             </a:pPr>
             <a:r>
-              <a:rPr sz="1200" b="0">
+              <a:rPr sz="1200" b="0" dirty="0">
                 <a:latin typeface="Arial"/>
               </a:rPr>
               <a:t>• </a:t>
             </a:r>
             <a:r>
-              <a:rPr sz="1200" b="1">
+              <a:rPr sz="1200" b="1" dirty="0">
                 <a:latin typeface="Arial"/>
               </a:rPr>
               <a:t>8%–15% Bulk Sourcing Savings: </a:t>
             </a:r>
             <a:r>
-              <a:rPr sz="1200" b="0">
-                <a:latin typeface="Arial"/>
-              </a:rPr>
-              <a:t>Combines common purchasing demand across all oil companies to secure high-volume discounts on the Government e-Marketplace (GeM).</a:t>
-            </a:r>
-          </a:p>
-          <a:p>
-            <a:pPr>
+              <a:rPr sz="1200" b="0" dirty="0">
+                <a:latin typeface="Arial"/>
+              </a:rPr>
+              <a:t>Combines common purchasing demand across all oil companies to secure high-volume discounts on the Government e-Marketplace (</a:t>
+            </a:r>
+            <a:r>
+              <a:rPr sz="1200" b="0" dirty="0" err="1">
+                <a:latin typeface="Arial"/>
+              </a:rPr>
+              <a:t>GeM</a:t>
+            </a:r>
+            <a:r>
+              <a:rPr sz="1200" b="0" dirty="0">
+                <a:latin typeface="Arial"/>
+              </a:rPr>
+              <a:t>).</a:t>
+            </a:r>
+          </a:p>
+          <a:p>
+            <a:pPr algn="just">
               <a:spcAft>
                 <a:spcPts val="800"/>
               </a:spcAft>
             </a:pPr>
             <a:r>
-              <a:rPr sz="1200" b="0">
+              <a:rPr sz="1200" b="0" dirty="0">
                 <a:latin typeface="Arial"/>
               </a:rPr>
               <a:t>• </a:t>
             </a:r>
             <a:r>
-              <a:rPr sz="1200" b="1">
+              <a:rPr sz="1200" b="1" dirty="0">
                 <a:latin typeface="Arial"/>
               </a:rPr>
               <a:t>Eliminates Rush-Purchase Premiums: </a:t>
             </a:r>
             <a:r>
-              <a:rPr sz="1200" b="0">
+              <a:rPr sz="1200" b="0" dirty="0">
                 <a:latin typeface="Arial"/>
               </a:rPr>
               <a:t>Avoids paying inflated spot-market prices and expensive emergency air-freight shipping during sudden equipment breakdowns.</a:t>
             </a:r>
           </a:p>
           <a:p>
-            <a:pPr>
+            <a:pPr algn="just">
               <a:spcAft>
                 <a:spcPts val="800"/>
               </a:spcAft>
             </a:pPr>
             <a:r>
-              <a:rPr sz="1200" b="0">
+              <a:rPr sz="1200" b="0" dirty="0">
                 <a:latin typeface="Arial"/>
               </a:rPr>
               <a:t>• </a:t>
             </a:r>
             <a:r>
-              <a:rPr sz="1200" b="1">
+              <a:rPr sz="1200" b="1" dirty="0">
                 <a:latin typeface="Arial"/>
               </a:rPr>
               <a:t>Lower Warehouse Holding Costs: </a:t>
             </a:r>
             <a:r>
-              <a:rPr sz="1200" b="0">
+              <a:rPr sz="1200" b="0" dirty="0">
                 <a:latin typeface="Arial"/>
               </a:rPr>
               <a:t>Reduces storage crowding, insurance fees, and obsolescence waste by sharing slow-moving backup and insurance spares.</a:t>
@@ -9145,7 +9291,7 @@
         <p:spPr>
           <a:xfrm>
             <a:off x="8360101" y="1400092"/>
-            <a:ext cx="3632219" cy="4389120"/>
+            <a:ext cx="3632219" cy="3544560"/>
           </a:xfrm>
           <a:prstGeom prst="rect">
             <a:avLst/>
@@ -9158,113 +9304,119 @@
           </a:bodyPr>
           <a:lstStyle/>
           <a:p>
-            <a:pPr>
+            <a:pPr algn="just">
               <a:spcAft>
                 <a:spcPts val="1000"/>
               </a:spcAft>
             </a:pPr>
             <a:r>
-              <a:rPr sz="1600" b="1">
+              <a:rPr sz="1600" b="1" dirty="0">
                 <a:latin typeface="Arial"/>
               </a:rPr>
               <a:t>Social, Strategic &amp; Green</a:t>
             </a:r>
           </a:p>
           <a:p>
-            <a:pPr>
+            <a:pPr algn="just">
               <a:spcAft>
                 <a:spcPts val="800"/>
               </a:spcAft>
             </a:pPr>
             <a:r>
-              <a:rPr sz="1200" b="0">
+              <a:rPr sz="1200" b="0" dirty="0">
                 <a:latin typeface="Arial"/>
               </a:rPr>
               <a:t>• </a:t>
             </a:r>
             <a:r>
-              <a:rPr sz="1200" b="1">
-                <a:latin typeface="Arial"/>
-              </a:rPr>
-              <a:t>Aatmanirbhar Bharat: </a:t>
-            </a:r>
-            <a:r>
-              <a:rPr sz="1200" b="0">
+              <a:rPr sz="1200" b="1" dirty="0" err="1">
+                <a:latin typeface="Arial"/>
+              </a:rPr>
+              <a:t>Aatmanirbhar</a:t>
+            </a:r>
+            <a:r>
+              <a:rPr sz="1200" b="1" dirty="0">
+                <a:latin typeface="Arial"/>
+              </a:rPr>
+              <a:t> Bharat: </a:t>
+            </a:r>
+            <a:r>
+              <a:rPr sz="1200" b="0" dirty="0">
                 <a:latin typeface="Arial"/>
               </a:rPr>
               <a:t>Builds sovereign digital infrastructure for India's energy sector, strengthening energy security and cutting foreign import dependency.</a:t>
             </a:r>
           </a:p>
           <a:p>
-            <a:pPr>
+            <a:pPr algn="just">
               <a:spcAft>
                 <a:spcPts val="800"/>
               </a:spcAft>
             </a:pPr>
             <a:r>
-              <a:rPr sz="1200" b="0">
+              <a:rPr sz="1200" b="0" dirty="0">
                 <a:latin typeface="Arial"/>
               </a:rPr>
               <a:t>• </a:t>
             </a:r>
             <a:r>
-              <a:rPr sz="1200" b="1">
+              <a:rPr sz="1200" b="1" dirty="0">
                 <a:latin typeface="Arial"/>
               </a:rPr>
               <a:t>Zero Industrial Accidents: </a:t>
             </a:r>
             <a:r>
-              <a:rPr sz="1200" b="0">
+              <a:rPr sz="1200" b="0" dirty="0">
                 <a:latin typeface="Arial"/>
               </a:rPr>
               <a:t>Strict ASME/ASTM safety guardrails eliminate mismatched valves and flanges, preventing hazardous leaks, explosions, and plant fires.</a:t>
             </a:r>
           </a:p>
           <a:p>
-            <a:pPr>
+            <a:pPr algn="just">
               <a:spcAft>
                 <a:spcPts val="800"/>
               </a:spcAft>
             </a:pPr>
             <a:r>
-              <a:rPr sz="1200" b="0">
+              <a:rPr sz="1200" b="0" dirty="0">
                 <a:latin typeface="Arial"/>
               </a:rPr>
               <a:t>• </a:t>
             </a:r>
             <a:r>
-              <a:rPr sz="1200" b="1">
+              <a:rPr sz="1200" b="1" dirty="0">
                 <a:latin typeface="Arial"/>
               </a:rPr>
               <a:t>Greener Operations &amp; Lower Emissions: </a:t>
             </a:r>
             <a:r>
-              <a:rPr sz="1200" b="0">
+              <a:rPr sz="1200" b="0" dirty="0">
                 <a:latin typeface="Arial"/>
               </a:rPr>
               <a:t>Mobilizing existing domestic surplus stock avoids unnecessary new steel manufacturing and cuts redundant transport emissions.</a:t>
             </a:r>
           </a:p>
           <a:p>
-            <a:pPr>
+            <a:pPr algn="just">
               <a:spcAft>
                 <a:spcPts val="800"/>
               </a:spcAft>
             </a:pPr>
             <a:r>
-              <a:rPr sz="1200" b="0">
+              <a:rPr sz="1200" b="0" dirty="0">
                 <a:latin typeface="Arial"/>
               </a:rPr>
               <a:t>• </a:t>
             </a:r>
             <a:r>
-              <a:rPr sz="1200" b="1">
+              <a:rPr sz="1200" b="1" dirty="0">
                 <a:latin typeface="Arial"/>
               </a:rPr>
               <a:t>Inter-PSU Collaboration: </a:t>
             </a:r>
             <a:r>
-              <a:rPr sz="1200" b="0">
+              <a:rPr sz="1200" b="0" dirty="0">
                 <a:latin typeface="Arial"/>
               </a:rPr>
               <a:t>Pioneers seamless resource sharing and cooperative governance across India's premier public sector enterprises.</a:t>
@@ -9282,6 +9434,9 @@
   <p:clrMapOvr>
     <a:masterClrMapping/>
   </p:clrMapOvr>
+  <p:transition spd="slow">
+    <p:wipe/>
+  </p:transition>
 </p:sld>
 </file>
 
@@ -9668,7 +9823,7 @@
               <a:t>High-speed graph search in </a:t>
             </a:r>
             <a:r>
-              <a:rPr sz="1200" b="0">
+              <a:rPr sz="1200" b="0" dirty="0" err="1">
                 <a:latin typeface="Arial"/>
               </a:rPr>
               <a:t>Qdrant</a:t>
@@ -9968,8 +10123,8 @@
           <a:p>
             <a:pPr algn="ctr"/>
             <a:r>
-              <a:rPr lang="en-US" dirty="0"/>
-              <a:t>Your Team Name</a:t>
+              <a:rPr lang="en-US" dirty="0" err="1"/>
+              <a:t>BharatCodex</a:t>
             </a:r>
             <a:endParaRPr lang="en-IN" dirty="0"/>
           </a:p>
@@ -10015,6 +10170,9 @@
   <p:clrMapOvr>
     <a:masterClrMapping/>
   </p:clrMapOvr>
+  <p:transition spd="slow">
+    <p:wipe/>
+  </p:transition>
 </p:sld>
 </file>
 

--- a/SIH_Presentation.pptx
+++ b/SIH_Presentation.pptx
@@ -26,7 +26,7 @@
       <p:boldItalic r:id="rId12"/>
     </p:embeddedFont>
     <p:embeddedFont>
-      <p:font typeface="Oswald" panose="00000500000000000000" pitchFamily="2" charset="0"/>
+      <p:font typeface="Oswald" panose="020F0502020204030204" pitchFamily="2" charset="0"/>
       <p:regular r:id="rId13"/>
       <p:bold r:id="rId14"/>
     </p:embeddedFont>
@@ -276,7 +276,7 @@
       </p15:sldGuideLst>
     </p:ext>
     <p:ext uri="GoogleSlidesCustomDataVersion2">
-      <go:slidesCustomData xmlns:go="http://customooxmlschemas.google.com/" xmlns:ahyp="http://schemas.microsoft.com/office/drawing/2018/hyperlinkcolor" xmlns:p15="http://schemas.microsoft.com/office/powerpoint/2012/main" xmlns:p14="http://schemas.microsoft.com/office/powerpoint/2010/main" xmlns:com="http://schemas.openxmlformats.org/drawingml/2006/compatibility" xmlns:pvml="urn:schemas-microsoft-com:office:powerpoint" xmlns:v="urn:schemas-microsoft-com:vml" xmlns:o="urn:schemas-microsoft-com:office:office" xmlns:dgm="http://schemas.openxmlformats.org/drawingml/2006/diagram" xmlns:c="http://schemas.openxmlformats.org/drawingml/2006/chart" xmlns:mv="urn:schemas-microsoft-com:mac:vml" xmlns:mc="http://schemas.openxmlformats.org/markup-compatibility/2006" xmlns="" r:id="rId19" roundtripDataSignature="AMtx7mgSta+fZv5Zqp4IgHLUMy4tewOjuw=="/>
+      <go:slidesCustomData xmlns="" xmlns:mc="http://schemas.openxmlformats.org/markup-compatibility/2006" xmlns:mv="urn:schemas-microsoft-com:mac:vml" xmlns:c="http://schemas.openxmlformats.org/drawingml/2006/chart" xmlns:dgm="http://schemas.openxmlformats.org/drawingml/2006/diagram" xmlns:o="urn:schemas-microsoft-com:office:office" xmlns:v="urn:schemas-microsoft-com:vml" xmlns:pvml="urn:schemas-microsoft-com:office:powerpoint" xmlns:com="http://schemas.openxmlformats.org/drawingml/2006/compatibility" xmlns:p14="http://schemas.microsoft.com/office/powerpoint/2010/main" xmlns:p15="http://schemas.microsoft.com/office/powerpoint/2012/main" xmlns:ahyp="http://schemas.microsoft.com/office/drawing/2018/hyperlinkcolor" xmlns:go="http://customooxmlschemas.google.com/" r:id="rId19" roundtripDataSignature="AMtx7mgSta+fZv5Zqp4IgHLUMy4tewOjuw=="/>
     </p:ext>
   </p:extLst>
 </p:presentation>
@@ -14020,7 +14020,7 @@
               </a:spcAft>
               <a:buNone/>
             </a:pPr>
-            <a:endParaRPr sz="1800">
+            <a:endParaRPr sz="1800" dirty="0">
               <a:solidFill>
                 <a:schemeClr val="dk1"/>
               </a:solidFill>
@@ -14041,7 +14041,7 @@
               <a:buNone/>
             </a:pPr>
             <a:r>
-              <a:rPr lang="en-US" sz="2000" b="1">
+              <a:rPr lang="en-US" sz="2000" b="1" dirty="0">
                 <a:solidFill>
                   <a:schemeClr val="dk1"/>
                 </a:solidFill>
@@ -14053,7 +14053,7 @@
               <a:t>Problem Statement ID: </a:t>
             </a:r>
             <a:r>
-              <a:rPr lang="en-US" sz="2000" b="0">
+              <a:rPr lang="en-US" sz="2000" b="0" dirty="0">
                 <a:solidFill>
                   <a:schemeClr val="dk1"/>
                 </a:solidFill>
@@ -14064,7 +14064,7 @@
               </a:rPr>
               <a:t>SIH26099</a:t>
             </a:r>
-            <a:endParaRPr/>
+            <a:endParaRPr dirty="0"/>
           </a:p>
           <a:p>
             <a:pPr marL="0" marR="0" lvl="0" indent="0" algn="l" rtl="0">
@@ -14077,7 +14077,7 @@
               <a:buNone/>
             </a:pPr>
             <a:r>
-              <a:rPr lang="en-US" sz="2000" b="1">
+              <a:rPr lang="en-US" sz="2000" b="1" dirty="0">
                 <a:solidFill>
                   <a:schemeClr val="dk1"/>
                 </a:solidFill>
@@ -14089,7 +14089,7 @@
               <a:t>Problem Statement Title: </a:t>
             </a:r>
             <a:r>
-              <a:rPr lang="en-US" sz="2000" b="0">
+              <a:rPr lang="en-US" sz="2000" b="0" dirty="0">
                 <a:solidFill>
                   <a:schemeClr val="dk1"/>
                 </a:solidFill>
@@ -14098,9 +14098,33 @@
                 <a:cs typeface="Arial"/>
                 <a:sym typeface="Arial"/>
               </a:rPr>
-              <a:t>AI-Driven Standardization and Harmonization of Material Codes Across CPSEs (MoPNG)</a:t>
+              <a:t>AI-Driven Standardization and Harmonization of Material Codes Across CPSEs (</a:t>
             </a:r>
-            <a:endParaRPr/>
+            <a:r>
+              <a:rPr lang="en-US" sz="2000" b="0" dirty="0" err="1">
+                <a:solidFill>
+                  <a:schemeClr val="dk1"/>
+                </a:solidFill>
+                <a:latin typeface="Arial"/>
+                <a:ea typeface="Arial"/>
+                <a:cs typeface="Arial"/>
+                <a:sym typeface="Arial"/>
+              </a:rPr>
+              <a:t>MoPNG</a:t>
+            </a:r>
+            <a:r>
+              <a:rPr lang="en-US" sz="2000" b="0" dirty="0">
+                <a:solidFill>
+                  <a:schemeClr val="dk1"/>
+                </a:solidFill>
+                <a:latin typeface="Arial"/>
+                <a:ea typeface="Arial"/>
+                <a:cs typeface="Arial"/>
+                <a:sym typeface="Arial"/>
+              </a:rPr>
+              <a:t>)</a:t>
+            </a:r>
+            <a:endParaRPr dirty="0"/>
           </a:p>
           <a:p>
             <a:pPr marL="0" marR="0" lvl="0" indent="0" algn="l" rtl="0">
@@ -14113,7 +14137,7 @@
               <a:buNone/>
             </a:pPr>
             <a:r>
-              <a:rPr lang="en-US" sz="2000" b="1">
+              <a:rPr lang="en-US" sz="2000" b="1" dirty="0">
                 <a:solidFill>
                   <a:schemeClr val="dk1"/>
                 </a:solidFill>
@@ -14125,7 +14149,7 @@
               <a:t>Theme: </a:t>
             </a:r>
             <a:r>
-              <a:rPr lang="en-US" sz="2000" b="0">
+              <a:rPr lang="en-US" sz="2000" b="0" dirty="0">
                 <a:solidFill>
                   <a:schemeClr val="dk1"/>
                 </a:solidFill>
@@ -14136,7 +14160,7 @@
               </a:rPr>
               <a:t>Smart Automation / Clean &amp; Green Technology</a:t>
             </a:r>
-            <a:endParaRPr/>
+            <a:endParaRPr dirty="0"/>
           </a:p>
           <a:p>
             <a:pPr marL="0" marR="0" lvl="0" indent="0" algn="l" rtl="0">
@@ -14149,7 +14173,7 @@
               <a:buNone/>
             </a:pPr>
             <a:r>
-              <a:rPr lang="en-US" sz="2000" b="1">
+              <a:rPr lang="en-US" sz="2000" b="1" dirty="0">
                 <a:solidFill>
                   <a:schemeClr val="dk1"/>
                 </a:solidFill>
@@ -14161,7 +14185,7 @@
               <a:t>PS Category: </a:t>
             </a:r>
             <a:r>
-              <a:rPr lang="en-US" sz="2000" b="0">
+              <a:rPr lang="en-US" sz="2000" b="0" dirty="0">
                 <a:solidFill>
                   <a:schemeClr val="dk1"/>
                 </a:solidFill>
@@ -14172,7 +14196,7 @@
               </a:rPr>
               <a:t>Software</a:t>
             </a:r>
-            <a:endParaRPr/>
+            <a:endParaRPr dirty="0"/>
           </a:p>
           <a:p>
             <a:pPr marL="0" marR="0" lvl="0" indent="0" algn="l" rtl="0">
@@ -14185,7 +14209,7 @@
               <a:buNone/>
             </a:pPr>
             <a:r>
-              <a:rPr lang="en-US" sz="2000" b="1">
+              <a:rPr lang="en-US" sz="2000" b="1" dirty="0">
                 <a:solidFill>
                   <a:schemeClr val="dk1"/>
                 </a:solidFill>
@@ -14197,14 +14221,14 @@
               <a:t>Team ID: </a:t>
             </a:r>
             <a:r>
-              <a:rPr lang="en-US" sz="2000">
+              <a:rPr lang="en-US" sz="2000" dirty="0">
                 <a:solidFill>
                   <a:schemeClr val="dk1"/>
                 </a:solidFill>
               </a:rPr>
-              <a:t>26P30</a:t>
+              <a:t>168042</a:t>
             </a:r>
-            <a:endParaRPr sz="2000" b="0">
+            <a:endParaRPr sz="2000" b="0" dirty="0">
               <a:solidFill>
                 <a:schemeClr val="dk1"/>
               </a:solidFill>
@@ -14225,7 +14249,7 @@
               <a:buNone/>
             </a:pPr>
             <a:r>
-              <a:rPr lang="en-US" sz="2000" b="1">
+              <a:rPr lang="en-US" sz="2000" b="1" dirty="0">
                 <a:solidFill>
                   <a:schemeClr val="dk1"/>
                 </a:solidFill>
@@ -14237,7 +14261,7 @@
               <a:t>Team Name: </a:t>
             </a:r>
             <a:r>
-              <a:rPr lang="en-US" sz="2000" b="0">
+              <a:rPr lang="en-US" sz="2000" b="0" dirty="0" err="1">
                 <a:solidFill>
                   <a:schemeClr val="dk1"/>
                 </a:solidFill>
@@ -14248,7 +14272,7 @@
               </a:rPr>
               <a:t>BharatCodex</a:t>
             </a:r>
-            <a:endParaRPr sz="2000" b="0">
+            <a:endParaRPr sz="2000" b="0" dirty="0">
               <a:solidFill>
                 <a:schemeClr val="dk1"/>
               </a:solidFill>
@@ -14329,7 +14353,7 @@
               <a:buSzPts val="3200"/>
               <a:buNone/>
             </a:pPr>
-            <a:endParaRPr/>
+            <a:endParaRPr dirty="0"/>
           </a:p>
           <a:p>
             <a:pPr marL="0" lvl="0" indent="0" algn="ctr" rtl="0">
@@ -14345,7 +14369,7 @@
               <a:buSzPts val="3200"/>
               <a:buNone/>
             </a:pPr>
-            <a:endParaRPr/>
+            <a:endParaRPr dirty="0"/>
           </a:p>
         </p:txBody>
       </p:sp>
@@ -14360,7 +14384,7 @@
         <p:fade/>
       </p:transition>
     </mc:Choice>
-    <mc:Fallback xmlns:ahyp="http://schemas.microsoft.com/office/drawing/2018/hyperlinkcolor" xmlns:p15="http://schemas.microsoft.com/office/powerpoint/2012/main" xmlns:com="http://schemas.openxmlformats.org/drawingml/2006/compatibility" xmlns:pvml="urn:schemas-microsoft-com:office:powerpoint" xmlns:v="urn:schemas-microsoft-com:vml" xmlns:o="urn:schemas-microsoft-com:office:office" xmlns:dgm="http://schemas.openxmlformats.org/drawingml/2006/diagram" xmlns:c="http://schemas.openxmlformats.org/drawingml/2006/chart" xmlns:mv="urn:schemas-microsoft-com:mac:vml" xmlns="">
+    <mc:Fallback xmlns="" xmlns:mv="urn:schemas-microsoft-com:mac:vml" xmlns:c="http://schemas.openxmlformats.org/drawingml/2006/chart" xmlns:dgm="http://schemas.openxmlformats.org/drawingml/2006/diagram" xmlns:o="urn:schemas-microsoft-com:office:office" xmlns:v="urn:schemas-microsoft-com:vml" xmlns:pvml="urn:schemas-microsoft-com:office:powerpoint" xmlns:com="http://schemas.openxmlformats.org/drawingml/2006/compatibility" xmlns:p15="http://schemas.microsoft.com/office/powerpoint/2012/main" xmlns:ahyp="http://schemas.microsoft.com/office/drawing/2018/hyperlinkcolor">
       <p:transition spd="slow">
         <p:fade/>
       </p:transition>
